--- a/Lecture slides/AMOS B01 - Team and Tools.pptx
+++ b/Lecture slides/AMOS B01 - Team and Tools.pptx
@@ -70,6 +70,7 @@
     <p:sldId id="314" r:id="rId66"/>
     <p:sldId id="315" r:id="rId67"/>
     <p:sldId id="316" r:id="rId68"/>
+    <p:sldId id="317" r:id="rId69"/>
   </p:sldIdLst>
   <p:sldSz cy="5143500" cx="9144000"/>
   <p:notesSz cx="6858000" cy="9144000"/>
@@ -4726,7 +4727,7 @@
       </p:grpSpPr>
       <p:sp>
         <p:nvSpPr>
-          <p:cNvPr id="399" name="Google Shape;399;g22c3a52a549_0_173:notes"/>
+          <p:cNvPr id="399" name="Google Shape;399;g3d5a07b7135_0_0:notes"/>
           <p:cNvSpPr/>
           <p:nvPr>
             <p:ph idx="2" type="sldImg"/>
@@ -4761,7 +4762,7 @@
       </p:sp>
       <p:sp>
         <p:nvSpPr>
-          <p:cNvPr id="400" name="Google Shape;400;g22c3a52a549_0_173:notes"/>
+          <p:cNvPr id="400" name="Google Shape;400;g3d5a07b7135_0_0:notes"/>
           <p:cNvSpPr txBox="1"/>
           <p:nvPr>
             <p:ph idx="1" type="body"/>
@@ -4825,7 +4826,7 @@
       </p:grpSpPr>
       <p:sp>
         <p:nvSpPr>
-          <p:cNvPr id="406" name="Google Shape;406;g22c3a52a549_0_179:notes"/>
+          <p:cNvPr id="406" name="Google Shape;406;g22c3a52a549_0_173:notes"/>
           <p:cNvSpPr/>
           <p:nvPr>
             <p:ph idx="2" type="sldImg"/>
@@ -4860,7 +4861,7 @@
       </p:sp>
       <p:sp>
         <p:nvSpPr>
-          <p:cNvPr id="407" name="Google Shape;407;g22c3a52a549_0_179:notes"/>
+          <p:cNvPr id="407" name="Google Shape;407;g22c3a52a549_0_173:notes"/>
           <p:cNvSpPr txBox="1"/>
           <p:nvPr>
             <p:ph idx="1" type="body"/>
@@ -4910,7 +4911,7 @@
   <p:cSld>
     <p:spTree>
       <p:nvGrpSpPr>
-        <p:cNvPr id="414" name="Shape 414"/>
+        <p:cNvPr id="412" name="Shape 412"/>
         <p:cNvGrpSpPr/>
         <p:nvPr/>
       </p:nvGrpSpPr>
@@ -4924,7 +4925,7 @@
       </p:grpSpPr>
       <p:sp>
         <p:nvSpPr>
-          <p:cNvPr id="415" name="Google Shape;415;g22c3a52a549_0_187:notes"/>
+          <p:cNvPr id="413" name="Google Shape;413;g22c3a52a549_0_179:notes"/>
           <p:cNvSpPr/>
           <p:nvPr>
             <p:ph idx="2" type="sldImg"/>
@@ -4959,7 +4960,7 @@
       </p:sp>
       <p:sp>
         <p:nvSpPr>
-          <p:cNvPr id="416" name="Google Shape;416;g22c3a52a549_0_187:notes"/>
+          <p:cNvPr id="414" name="Google Shape;414;g22c3a52a549_0_179:notes"/>
           <p:cNvSpPr txBox="1"/>
           <p:nvPr>
             <p:ph idx="1" type="body"/>
@@ -5023,7 +5024,7 @@
       </p:grpSpPr>
       <p:sp>
         <p:nvSpPr>
-          <p:cNvPr id="422" name="Google Shape;422;g39f22ec5a7f_0_12:notes"/>
+          <p:cNvPr id="422" name="Google Shape;422;g22c3a52a549_0_187:notes"/>
           <p:cNvSpPr/>
           <p:nvPr>
             <p:ph idx="2" type="sldImg"/>
@@ -5058,7 +5059,7 @@
       </p:sp>
       <p:sp>
         <p:nvSpPr>
-          <p:cNvPr id="423" name="Google Shape;423;g39f22ec5a7f_0_12:notes"/>
+          <p:cNvPr id="423" name="Google Shape;423;g22c3a52a549_0_187:notes"/>
           <p:cNvSpPr txBox="1"/>
           <p:nvPr>
             <p:ph idx="1" type="body"/>
@@ -5207,7 +5208,7 @@
   <p:cSld>
     <p:spTree>
       <p:nvGrpSpPr>
-        <p:cNvPr id="426" name="Shape 426"/>
+        <p:cNvPr id="428" name="Shape 428"/>
         <p:cNvGrpSpPr/>
         <p:nvPr/>
       </p:nvGrpSpPr>
@@ -5221,7 +5222,7 @@
       </p:grpSpPr>
       <p:sp>
         <p:nvSpPr>
-          <p:cNvPr id="427" name="Google Shape;427;g39f22ec5a7f_0_16:notes"/>
+          <p:cNvPr id="429" name="Google Shape;429;g39f22ec5a7f_0_12:notes"/>
           <p:cNvSpPr/>
           <p:nvPr>
             <p:ph idx="2" type="sldImg"/>
@@ -5256,7 +5257,7 @@
       </p:sp>
       <p:sp>
         <p:nvSpPr>
-          <p:cNvPr id="428" name="Google Shape;428;g39f22ec5a7f_0_16:notes"/>
+          <p:cNvPr id="430" name="Google Shape;430;g39f22ec5a7f_0_12:notes"/>
           <p:cNvSpPr txBox="1"/>
           <p:nvPr>
             <p:ph idx="1" type="body"/>
@@ -5320,7 +5321,7 @@
       </p:grpSpPr>
       <p:sp>
         <p:nvSpPr>
-          <p:cNvPr id="434" name="Google Shape;434;g39f22ec5a7f_0_22:notes"/>
+          <p:cNvPr id="434" name="Google Shape;434;g39f22ec5a7f_0_16:notes"/>
           <p:cNvSpPr/>
           <p:nvPr>
             <p:ph idx="2" type="sldImg"/>
@@ -5355,7 +5356,7 @@
       </p:sp>
       <p:sp>
         <p:nvSpPr>
-          <p:cNvPr id="435" name="Google Shape;435;g39f22ec5a7f_0_22:notes"/>
+          <p:cNvPr id="435" name="Google Shape;435;g39f22ec5a7f_0_16:notes"/>
           <p:cNvSpPr txBox="1"/>
           <p:nvPr>
             <p:ph idx="1" type="body"/>
@@ -5405,7 +5406,7 @@
   <p:cSld>
     <p:spTree>
       <p:nvGrpSpPr>
-        <p:cNvPr id="438" name="Shape 438"/>
+        <p:cNvPr id="440" name="Shape 440"/>
         <p:cNvGrpSpPr/>
         <p:nvPr/>
       </p:nvGrpSpPr>
@@ -5419,7 +5420,7 @@
       </p:grpSpPr>
       <p:sp>
         <p:nvSpPr>
-          <p:cNvPr id="439" name="Google Shape;439;g39f22ec5a7f_0_26:notes"/>
+          <p:cNvPr id="441" name="Google Shape;441;g39f22ec5a7f_0_22:notes"/>
           <p:cNvSpPr/>
           <p:nvPr>
             <p:ph idx="2" type="sldImg"/>
@@ -5454,7 +5455,7 @@
       </p:sp>
       <p:sp>
         <p:nvSpPr>
-          <p:cNvPr id="440" name="Google Shape;440;g39f22ec5a7f_0_26:notes"/>
+          <p:cNvPr id="442" name="Google Shape;442;g39f22ec5a7f_0_22:notes"/>
           <p:cNvSpPr txBox="1"/>
           <p:nvPr>
             <p:ph idx="1" type="body"/>
@@ -5518,7 +5519,7 @@
       </p:grpSpPr>
       <p:sp>
         <p:nvSpPr>
-          <p:cNvPr id="446" name="Google Shape;446;g22c3a52a549_0_249:notes"/>
+          <p:cNvPr id="446" name="Google Shape;446;g39f22ec5a7f_0_26:notes"/>
           <p:cNvSpPr/>
           <p:nvPr>
             <p:ph idx="2" type="sldImg"/>
@@ -5553,7 +5554,7 @@
       </p:sp>
       <p:sp>
         <p:nvSpPr>
-          <p:cNvPr id="447" name="Google Shape;447;g22c3a52a549_0_249:notes"/>
+          <p:cNvPr id="447" name="Google Shape;447;g39f22ec5a7f_0_26:notes"/>
           <p:cNvSpPr txBox="1"/>
           <p:nvPr>
             <p:ph idx="1" type="body"/>
@@ -5603,7 +5604,7 @@
   <p:cSld>
     <p:spTree>
       <p:nvGrpSpPr>
-        <p:cNvPr id="450" name="Shape 450"/>
+        <p:cNvPr id="452" name="Shape 452"/>
         <p:cNvGrpSpPr/>
         <p:nvPr/>
       </p:nvGrpSpPr>
@@ -5617,7 +5618,7 @@
       </p:grpSpPr>
       <p:sp>
         <p:nvSpPr>
-          <p:cNvPr id="451" name="Google Shape;451;g152a3f74d0d_0_22:notes"/>
+          <p:cNvPr id="453" name="Google Shape;453;g22c3a52a549_0_249:notes"/>
           <p:cNvSpPr/>
           <p:nvPr>
             <p:ph idx="2" type="sldImg"/>
@@ -5652,7 +5653,7 @@
       </p:sp>
       <p:sp>
         <p:nvSpPr>
-          <p:cNvPr id="452" name="Google Shape;452;g152a3f74d0d_0_22:notes"/>
+          <p:cNvPr id="454" name="Google Shape;454;g22c3a52a549_0_249:notes"/>
           <p:cNvSpPr txBox="1"/>
           <p:nvPr>
             <p:ph idx="1" type="body"/>
@@ -5716,7 +5717,7 @@
       </p:grpSpPr>
       <p:sp>
         <p:nvSpPr>
-          <p:cNvPr id="458" name="Google Shape;458;g22c56dd9f66_0_3:notes"/>
+          <p:cNvPr id="458" name="Google Shape;458;g152a3f74d0d_0_22:notes"/>
           <p:cNvSpPr/>
           <p:nvPr>
             <p:ph idx="2" type="sldImg"/>
@@ -5751,7 +5752,7 @@
       </p:sp>
       <p:sp>
         <p:nvSpPr>
-          <p:cNvPr id="459" name="Google Shape;459;g22c56dd9f66_0_3:notes"/>
+          <p:cNvPr id="459" name="Google Shape;459;g152a3f74d0d_0_22:notes"/>
           <p:cNvSpPr txBox="1"/>
           <p:nvPr>
             <p:ph idx="1" type="body"/>
@@ -5801,7 +5802,7 @@
   <p:cSld>
     <p:spTree>
       <p:nvGrpSpPr>
-        <p:cNvPr id="465" name="Shape 465"/>
+        <p:cNvPr id="464" name="Shape 464"/>
         <p:cNvGrpSpPr/>
         <p:nvPr/>
       </p:nvGrpSpPr>
@@ -5815,7 +5816,7 @@
       </p:grpSpPr>
       <p:sp>
         <p:nvSpPr>
-          <p:cNvPr id="466" name="Google Shape;466;g22c3a52a549_0_28:notes"/>
+          <p:cNvPr id="465" name="Google Shape;465;g22c56dd9f66_0_3:notes"/>
           <p:cNvSpPr/>
           <p:nvPr>
             <p:ph idx="2" type="sldImg"/>
@@ -5850,7 +5851,7 @@
       </p:sp>
       <p:sp>
         <p:nvSpPr>
-          <p:cNvPr id="467" name="Google Shape;467;g22c3a52a549_0_28:notes"/>
+          <p:cNvPr id="466" name="Google Shape;466;g22c56dd9f66_0_3:notes"/>
           <p:cNvSpPr txBox="1"/>
           <p:nvPr>
             <p:ph idx="1" type="body"/>
@@ -5900,7 +5901,7 @@
   <p:cSld>
     <p:spTree>
       <p:nvGrpSpPr>
-        <p:cNvPr id="470" name="Shape 470"/>
+        <p:cNvPr id="472" name="Shape 472"/>
         <p:cNvGrpSpPr/>
         <p:nvPr/>
       </p:nvGrpSpPr>
@@ -5914,7 +5915,7 @@
       </p:grpSpPr>
       <p:sp>
         <p:nvSpPr>
-          <p:cNvPr id="471" name="Google Shape;471;g152a3f74d0d_0_44:notes"/>
+          <p:cNvPr id="473" name="Google Shape;473;g22c3a52a549_0_28:notes"/>
           <p:cNvSpPr/>
           <p:nvPr>
             <p:ph idx="2" type="sldImg"/>
@@ -5949,7 +5950,7 @@
       </p:sp>
       <p:sp>
         <p:nvSpPr>
-          <p:cNvPr id="472" name="Google Shape;472;g152a3f74d0d_0_44:notes"/>
+          <p:cNvPr id="474" name="Google Shape;474;g22c3a52a549_0_28:notes"/>
           <p:cNvSpPr txBox="1"/>
           <p:nvPr>
             <p:ph idx="1" type="body"/>
@@ -5999,7 +6000,7 @@
   <p:cSld>
     <p:spTree>
       <p:nvGrpSpPr>
-        <p:cNvPr id="479" name="Shape 479"/>
+        <p:cNvPr id="477" name="Shape 477"/>
         <p:cNvGrpSpPr/>
         <p:nvPr/>
       </p:nvGrpSpPr>
@@ -6013,7 +6014,7 @@
       </p:grpSpPr>
       <p:sp>
         <p:nvSpPr>
-          <p:cNvPr id="480" name="Google Shape;480;g22c56dd9f66_0_29:notes"/>
+          <p:cNvPr id="478" name="Google Shape;478;g152a3f74d0d_0_44:notes"/>
           <p:cNvSpPr/>
           <p:nvPr>
             <p:ph idx="2" type="sldImg"/>
@@ -6048,7 +6049,7 @@
       </p:sp>
       <p:sp>
         <p:nvSpPr>
-          <p:cNvPr id="481" name="Google Shape;481;g22c56dd9f66_0_29:notes"/>
+          <p:cNvPr id="479" name="Google Shape;479;g152a3f74d0d_0_44:notes"/>
           <p:cNvSpPr txBox="1"/>
           <p:nvPr>
             <p:ph idx="1" type="body"/>
@@ -6112,7 +6113,7 @@
       </p:grpSpPr>
       <p:sp>
         <p:nvSpPr>
-          <p:cNvPr id="487" name="Google Shape;487;g22c56dd9f66_0_37:notes"/>
+          <p:cNvPr id="487" name="Google Shape;487;g22c56dd9f66_0_29:notes"/>
           <p:cNvSpPr/>
           <p:nvPr>
             <p:ph idx="2" type="sldImg"/>
@@ -6147,7 +6148,7 @@
       </p:sp>
       <p:sp>
         <p:nvSpPr>
-          <p:cNvPr id="488" name="Google Shape;488;g22c56dd9f66_0_37:notes"/>
+          <p:cNvPr id="488" name="Google Shape;488;g22c56dd9f66_0_29:notes"/>
           <p:cNvSpPr txBox="1"/>
           <p:nvPr>
             <p:ph idx="1" type="body"/>
@@ -6310,7 +6311,7 @@
       </p:grpSpPr>
       <p:sp>
         <p:nvSpPr>
-          <p:cNvPr id="494" name="Google Shape;494;g239869f5abc_0_38:notes"/>
+          <p:cNvPr id="494" name="Google Shape;494;g22c56dd9f66_0_37:notes"/>
           <p:cNvSpPr/>
           <p:nvPr>
             <p:ph idx="2" type="sldImg"/>
@@ -6345,7 +6346,7 @@
       </p:sp>
       <p:sp>
         <p:nvSpPr>
-          <p:cNvPr id="495" name="Google Shape;495;g239869f5abc_0_38:notes"/>
+          <p:cNvPr id="495" name="Google Shape;495;g22c56dd9f66_0_37:notes"/>
           <p:cNvSpPr txBox="1"/>
           <p:nvPr>
             <p:ph idx="1" type="body"/>
@@ -6395,7 +6396,7 @@
   <p:cSld>
     <p:spTree>
       <p:nvGrpSpPr>
-        <p:cNvPr id="499" name="Shape 499"/>
+        <p:cNvPr id="500" name="Shape 500"/>
         <p:cNvGrpSpPr/>
         <p:nvPr/>
       </p:nvGrpSpPr>
@@ -6409,7 +6410,7 @@
       </p:grpSpPr>
       <p:sp>
         <p:nvSpPr>
-          <p:cNvPr id="500" name="Google Shape;500;g239869f5abc_0_43:notes"/>
+          <p:cNvPr id="501" name="Google Shape;501;g239869f5abc_0_38:notes"/>
           <p:cNvSpPr/>
           <p:nvPr>
             <p:ph idx="2" type="sldImg"/>
@@ -6444,7 +6445,106 @@
       </p:sp>
       <p:sp>
         <p:nvSpPr>
-          <p:cNvPr id="501" name="Google Shape;501;g239869f5abc_0_43:notes"/>
+          <p:cNvPr id="502" name="Google Shape;502;g239869f5abc_0_38:notes"/>
+          <p:cNvSpPr txBox="1"/>
+          <p:nvPr>
+            <p:ph idx="1" type="body"/>
+          </p:nvPr>
+        </p:nvSpPr>
+        <p:spPr>
+          <a:xfrm>
+            <a:off x="685800" y="4343400"/>
+            <a:ext cx="5486400" cy="4114800"/>
+          </a:xfrm>
+          <a:prstGeom prst="rect">
+            <a:avLst/>
+          </a:prstGeom>
+        </p:spPr>
+        <p:txBody>
+          <a:bodyPr anchorCtr="0" anchor="t" bIns="91425" lIns="91425" spcFirstLastPara="1" rIns="91425" wrap="square" tIns="91425">
+            <a:noAutofit/>
+          </a:bodyPr>
+          <a:lstStyle/>
+          <a:p>
+            <a:pPr indent="0" lvl="0" marL="0" rtl="0" algn="l">
+              <a:spcBef>
+                <a:spcPts val="0"/>
+              </a:spcBef>
+              <a:spcAft>
+                <a:spcPts val="0"/>
+              </a:spcAft>
+              <a:buNone/>
+            </a:pPr>
+            <a:r>
+              <a:t/>
+            </a:r>
+            <a:endParaRPr/>
+          </a:p>
+        </p:txBody>
+      </p:sp>
+    </p:spTree>
+  </p:cSld>
+  <p:clrMapOvr>
+    <a:masterClrMapping/>
+  </p:clrMapOvr>
+</p:notes>
+</file>
+
+<file path=ppt/notesSlides/notesSlide62.xml><?xml version="1.0" encoding="utf-8"?>
+<p:notes xmlns:a="http://schemas.openxmlformats.org/drawingml/2006/main" xmlns:r="http://schemas.openxmlformats.org/officeDocument/2006/relationships" xmlns:mc="http://schemas.openxmlformats.org/markup-compatibility/2006" xmlns:mv="urn:schemas-microsoft-com:mac:vml" xmlns:p="http://schemas.openxmlformats.org/presentationml/2006/main" xmlns:c="http://schemas.openxmlformats.org/drawingml/2006/chart" xmlns:dgm="http://schemas.openxmlformats.org/drawingml/2006/diagram" xmlns:o="urn:schemas-microsoft-com:office:office" xmlns:v="urn:schemas-microsoft-com:vml" xmlns:pvml="urn:schemas-microsoft-com:office:powerpoint" xmlns:com="http://schemas.openxmlformats.org/drawingml/2006/compatibility" xmlns:p14="http://schemas.microsoft.com/office/powerpoint/2010/main" xmlns:p15="http://schemas.microsoft.com/office/powerpoint/2012/main" xmlns:ahyp="http://schemas.microsoft.com/office/drawing/2018/hyperlinkcolor" showMasterPhAnim="0" showMasterSp="0">
+  <p:cSld>
+    <p:spTree>
+      <p:nvGrpSpPr>
+        <p:cNvPr id="506" name="Shape 506"/>
+        <p:cNvGrpSpPr/>
+        <p:nvPr/>
+      </p:nvGrpSpPr>
+      <p:grpSpPr>
+        <a:xfrm>
+          <a:off x="0" y="0"/>
+          <a:ext cx="0" cy="0"/>
+          <a:chOff x="0" y="0"/>
+          <a:chExt cx="0" cy="0"/>
+        </a:xfrm>
+      </p:grpSpPr>
+      <p:sp>
+        <p:nvSpPr>
+          <p:cNvPr id="507" name="Google Shape;507;g239869f5abc_0_43:notes"/>
+          <p:cNvSpPr/>
+          <p:nvPr>
+            <p:ph idx="2" type="sldImg"/>
+          </p:nvPr>
+        </p:nvSpPr>
+        <p:spPr>
+          <a:xfrm>
+            <a:off x="381300" y="685800"/>
+            <a:ext cx="6096000" cy="3429000"/>
+          </a:xfrm>
+          <a:custGeom>
+            <a:rect b="b" l="l" r="r" t="t"/>
+            <a:pathLst>
+              <a:path extrusionOk="0" h="120000" w="120000">
+                <a:moveTo>
+                  <a:pt x="0" y="0"/>
+                </a:moveTo>
+                <a:lnTo>
+                  <a:pt x="120000" y="0"/>
+                </a:lnTo>
+                <a:lnTo>
+                  <a:pt x="120000" y="120000"/>
+                </a:lnTo>
+                <a:lnTo>
+                  <a:pt x="0" y="120000"/>
+                </a:lnTo>
+                <a:close/>
+              </a:path>
+            </a:pathLst>
+          </a:custGeom>
+        </p:spPr>
+      </p:sp>
+      <p:sp>
+        <p:nvSpPr>
+          <p:cNvPr id="508" name="Google Shape;508;g239869f5abc_0_43:notes"/>
           <p:cNvSpPr txBox="1"/>
           <p:nvPr>
             <p:ph idx="1" type="body"/>
@@ -17505,7 +17605,7 @@
             <a:tbl>
               <a:tblPr>
                 <a:noFill/>
-                <a:tableStyleId>{EEEC39EC-E8EC-47B3-9974-D8D9D21029F1}</a:tableStyleId>
+                <a:tableStyleId>{3F3F5E55-9B0B-47E0-9DEB-F5BFAA86F13F}</a:tableStyleId>
               </a:tblPr>
               <a:tblGrid>
                 <a:gridCol w="524750"/>
@@ -21526,7 +21626,7 @@
             <a:tbl>
               <a:tblPr>
                 <a:noFill/>
-                <a:tableStyleId>{160AA683-9FE0-4D92-B74A-12C56E95FA36}</a:tableStyleId>
+                <a:tableStyleId>{40F53428-5582-4234-8027-4FD8F5D3A187}</a:tableStyleId>
               </a:tblPr>
               <a:tblGrid>
                 <a:gridCol w="2148850"/>
@@ -27093,7 +27193,7 @@
             </a:pPr>
             <a:r>
               <a:rPr lang="en"/>
-              <a:t>If you want your work to count,</a:t>
+              <a:t>If you want your programming work to count,</a:t>
             </a:r>
             <a:endParaRPr/>
           </a:p>
@@ -27585,7 +27685,7 @@
             </a:pPr>
             <a:r>
               <a:rPr lang="en"/>
-              <a:t>The AMOS Project Licenses</a:t>
+              <a:t>Use of Code AIs</a:t>
             </a:r>
             <a:endParaRPr/>
           </a:p>
@@ -27625,37 +27725,39 @@
             </a:pPr>
             <a:r>
               <a:rPr lang="en"/>
-              <a:t>For source code, we use the MIT license</a:t>
-            </a:r>
-            <a:endParaRPr/>
-          </a:p>
-          <a:p>
-            <a:pPr indent="-342900" lvl="0" marL="457200" rtl="0" algn="l">
+              <a:t>The use of code AIs is not only allowed, it is encouraged</a:t>
+            </a:r>
+            <a:endParaRPr/>
+          </a:p>
+          <a:p>
+            <a:pPr indent="0" lvl="0" marL="0" rtl="0" algn="l">
               <a:spcBef>
                 <a:spcPts val="1200"/>
               </a:spcBef>
               <a:spcAft>
                 <a:spcPts val="0"/>
               </a:spcAft>
-              <a:buSzPts val="1800"/>
-              <a:buChar char="●"/>
+              <a:buNone/>
             </a:pPr>
             <a:r>
               <a:rPr lang="en"/>
-              <a:t>See </a:t>
-            </a:r>
-            <a:r>
-              <a:rPr lang="en" u="sng">
-                <a:solidFill>
-                  <a:schemeClr val="hlink"/>
-                </a:solidFill>
-                <a:hlinkClick r:id="rId3"/>
-              </a:rPr>
-              <a:t>https://opensource.org/licenses/MIT</a:t>
-            </a:r>
+              <a:t>You, the human, remain responsible for your work results, though</a:t>
+            </a:r>
+            <a:endParaRPr/>
+          </a:p>
+          <a:p>
+            <a:pPr indent="0" lvl="0" marL="0" rtl="0" algn="l">
+              <a:spcBef>
+                <a:spcPts val="1200"/>
+              </a:spcBef>
+              <a:spcAft>
+                <a:spcPts val="0"/>
+              </a:spcAft>
+              <a:buNone/>
+            </a:pPr>
             <a:r>
               <a:rPr lang="en"/>
-              <a:t> </a:t>
+              <a:t>Under peer review, author and committer share the responsibility</a:t>
             </a:r>
             <a:endParaRPr/>
           </a:p>
@@ -27671,52 +27773,23 @@
             </a:pPr>
             <a:r>
               <a:rPr lang="en"/>
-              <a:t>For other data, we use the CC BY 4.0 license</a:t>
-            </a:r>
-            <a:endParaRPr/>
-          </a:p>
-          <a:p>
-            <a:pPr indent="-342900" lvl="0" marL="457200" rtl="0" algn="l">
+              <a:t>During grading, we do look at the quality of your source code</a:t>
+            </a:r>
+            <a:endParaRPr/>
+          </a:p>
+          <a:p>
+            <a:pPr indent="0" lvl="0" marL="0" rtl="0" algn="l">
               <a:spcBef>
                 <a:spcPts val="1200"/>
               </a:spcBef>
               <a:spcAft>
-                <a:spcPts val="0"/>
-              </a:spcAft>
-              <a:buSzPts val="1800"/>
-              <a:buChar char="●"/>
+                <a:spcPts val="1200"/>
+              </a:spcAft>
+              <a:buNone/>
             </a:pPr>
             <a:r>
               <a:rPr lang="en"/>
-              <a:t>See </a:t>
-            </a:r>
-            <a:r>
-              <a:rPr lang="en" u="sng">
-                <a:solidFill>
-                  <a:schemeClr val="hlink"/>
-                </a:solidFill>
-                <a:hlinkClick r:id="rId4"/>
-              </a:rPr>
-              <a:t>https://creativecommons.org/licenses/by/4.0/</a:t>
-            </a:r>
-            <a:r>
-              <a:rPr lang="en"/>
-              <a:t> </a:t>
-            </a:r>
-            <a:endParaRPr/>
-          </a:p>
-          <a:p>
-            <a:pPr indent="0" lvl="0" marL="0" rtl="0" algn="l">
-              <a:spcBef>
-                <a:spcPts val="1200"/>
-              </a:spcBef>
-              <a:spcAft>
-                <a:spcPts val="1200"/>
-              </a:spcAft>
-              <a:buNone/>
-            </a:pPr>
-            <a:r>
-              <a:t/>
+              <a:t>Sign-offs by code AIs are not accepted and a big red flag </a:t>
             </a:r>
             <a:endParaRPr/>
           </a:p>
@@ -27755,18 +27828,10 @@
               <a:buNone/>
             </a:pPr>
             <a:fld id="{00000000-1234-1234-1234-123412341234}" type="slidenum">
-              <a:rPr lang="en">
-                <a:solidFill>
-                  <a:schemeClr val="dk1"/>
-                </a:solidFill>
-              </a:rPr>
+              <a:rPr lang="en"/>
               <a:t>‹#›</a:t>
             </a:fld>
-            <a:endParaRPr>
-              <a:solidFill>
-                <a:schemeClr val="dk1"/>
-              </a:solidFill>
-            </a:endParaRPr>
+            <a:endParaRPr/>
           </a:p>
           <a:p>
             <a:pPr indent="0" lvl="0" marL="0" rtl="0" algn="r">
@@ -27783,15 +27848,23 @@
                 <a:solidFill>
                   <a:schemeClr val="hlink"/>
                 </a:solidFill>
-                <a:hlinkClick r:id="rId5"/>
+                <a:hlinkClick r:id="rId3"/>
               </a:rPr>
               <a:t>https://oss.cs.fau.de</a:t>
             </a:r>
             <a:r>
-              <a:rPr b="0" lang="en" sz="900"/>
+              <a:rPr b="0" lang="en" sz="900">
+                <a:solidFill>
+                  <a:schemeClr val="dk2"/>
+                </a:solidFill>
+              </a:rPr>
               <a:t> </a:t>
             </a:r>
-            <a:endParaRPr b="0" sz="900"/>
+            <a:endParaRPr b="0" sz="900">
+              <a:solidFill>
+                <a:schemeClr val="dk2"/>
+              </a:solidFill>
+            </a:endParaRPr>
           </a:p>
         </p:txBody>
       </p:sp>
@@ -27854,7 +27927,7 @@
             </a:pPr>
             <a:r>
               <a:rPr lang="en"/>
-              <a:t>License and Copyright Declaration in Files</a:t>
+              <a:t>The AMOS Project Licenses</a:t>
             </a:r>
             <a:endParaRPr/>
           </a:p>
@@ -27863,6 +27936,275 @@
       <p:sp>
         <p:nvSpPr>
           <p:cNvPr id="410" name="Google Shape;410;p61"/>
+          <p:cNvSpPr txBox="1"/>
+          <p:nvPr>
+            <p:ph idx="1" type="body"/>
+          </p:nvPr>
+        </p:nvSpPr>
+        <p:spPr>
+          <a:xfrm>
+            <a:off x="274320" y="914400"/>
+            <a:ext cx="8595300" cy="4114800"/>
+          </a:xfrm>
+          <a:prstGeom prst="rect">
+            <a:avLst/>
+          </a:prstGeom>
+        </p:spPr>
+        <p:txBody>
+          <a:bodyPr anchorCtr="0" anchor="t" bIns="0" lIns="0" spcFirstLastPara="1" rIns="0" wrap="square" tIns="0">
+            <a:noAutofit/>
+          </a:bodyPr>
+          <a:lstStyle/>
+          <a:p>
+            <a:pPr indent="0" lvl="0" marL="0" rtl="0" algn="l">
+              <a:spcBef>
+                <a:spcPts val="0"/>
+              </a:spcBef>
+              <a:spcAft>
+                <a:spcPts val="0"/>
+              </a:spcAft>
+              <a:buNone/>
+            </a:pPr>
+            <a:r>
+              <a:rPr lang="en"/>
+              <a:t>For source code, we use the MIT license</a:t>
+            </a:r>
+            <a:endParaRPr/>
+          </a:p>
+          <a:p>
+            <a:pPr indent="-342900" lvl="0" marL="457200" rtl="0" algn="l">
+              <a:spcBef>
+                <a:spcPts val="1200"/>
+              </a:spcBef>
+              <a:spcAft>
+                <a:spcPts val="0"/>
+              </a:spcAft>
+              <a:buSzPts val="1800"/>
+              <a:buChar char="●"/>
+            </a:pPr>
+            <a:r>
+              <a:rPr lang="en"/>
+              <a:t>See </a:t>
+            </a:r>
+            <a:r>
+              <a:rPr lang="en" u="sng">
+                <a:solidFill>
+                  <a:schemeClr val="hlink"/>
+                </a:solidFill>
+                <a:hlinkClick r:id="rId3"/>
+              </a:rPr>
+              <a:t>https://opensource.org/licenses/MIT</a:t>
+            </a:r>
+            <a:r>
+              <a:rPr lang="en"/>
+              <a:t> </a:t>
+            </a:r>
+            <a:endParaRPr/>
+          </a:p>
+          <a:p>
+            <a:pPr indent="0" lvl="0" marL="0" rtl="0" algn="l">
+              <a:spcBef>
+                <a:spcPts val="1200"/>
+              </a:spcBef>
+              <a:spcAft>
+                <a:spcPts val="0"/>
+              </a:spcAft>
+              <a:buNone/>
+            </a:pPr>
+            <a:r>
+              <a:rPr lang="en"/>
+              <a:t>For other data, we use the CC BY 4.0 license</a:t>
+            </a:r>
+            <a:endParaRPr/>
+          </a:p>
+          <a:p>
+            <a:pPr indent="-342900" lvl="0" marL="457200" rtl="0" algn="l">
+              <a:spcBef>
+                <a:spcPts val="1200"/>
+              </a:spcBef>
+              <a:spcAft>
+                <a:spcPts val="0"/>
+              </a:spcAft>
+              <a:buSzPts val="1800"/>
+              <a:buChar char="●"/>
+            </a:pPr>
+            <a:r>
+              <a:rPr lang="en"/>
+              <a:t>See </a:t>
+            </a:r>
+            <a:r>
+              <a:rPr lang="en" u="sng">
+                <a:solidFill>
+                  <a:schemeClr val="hlink"/>
+                </a:solidFill>
+                <a:hlinkClick r:id="rId4"/>
+              </a:rPr>
+              <a:t>https://creativecommons.org/licenses/by/4.0/</a:t>
+            </a:r>
+            <a:r>
+              <a:rPr lang="en"/>
+              <a:t> </a:t>
+            </a:r>
+            <a:endParaRPr/>
+          </a:p>
+          <a:p>
+            <a:pPr indent="0" lvl="0" marL="0" rtl="0" algn="l">
+              <a:spcBef>
+                <a:spcPts val="1200"/>
+              </a:spcBef>
+              <a:spcAft>
+                <a:spcPts val="1200"/>
+              </a:spcAft>
+              <a:buNone/>
+            </a:pPr>
+            <a:r>
+              <a:t/>
+            </a:r>
+            <a:endParaRPr/>
+          </a:p>
+        </p:txBody>
+      </p:sp>
+      <p:sp>
+        <p:nvSpPr>
+          <p:cNvPr id="411" name="Google Shape;411;p61"/>
+          <p:cNvSpPr txBox="1"/>
+          <p:nvPr>
+            <p:ph idx="12" type="sldNum"/>
+          </p:nvPr>
+        </p:nvSpPr>
+        <p:spPr>
+          <a:xfrm>
+            <a:off x="7315202" y="4416550"/>
+            <a:ext cx="1828800" cy="731400"/>
+          </a:xfrm>
+          <a:prstGeom prst="rect">
+            <a:avLst/>
+          </a:prstGeom>
+        </p:spPr>
+        <p:txBody>
+          <a:bodyPr anchorCtr="0" anchor="b" bIns="91425" lIns="91425" spcFirstLastPara="1" rIns="91425" wrap="square" tIns="91425">
+            <a:noAutofit/>
+          </a:bodyPr>
+          <a:lstStyle/>
+          <a:p>
+            <a:pPr indent="0" lvl="0" marL="0" rtl="0" algn="r">
+              <a:spcBef>
+                <a:spcPts val="0"/>
+              </a:spcBef>
+              <a:spcAft>
+                <a:spcPts val="0"/>
+              </a:spcAft>
+              <a:buNone/>
+            </a:pPr>
+            <a:fld id="{00000000-1234-1234-1234-123412341234}" type="slidenum">
+              <a:rPr lang="en">
+                <a:solidFill>
+                  <a:schemeClr val="dk1"/>
+                </a:solidFill>
+              </a:rPr>
+              <a:t>‹#›</a:t>
+            </a:fld>
+            <a:endParaRPr>
+              <a:solidFill>
+                <a:schemeClr val="dk1"/>
+              </a:solidFill>
+            </a:endParaRPr>
+          </a:p>
+          <a:p>
+            <a:pPr indent="0" lvl="0" marL="0" rtl="0" algn="r">
+              <a:spcBef>
+                <a:spcPts val="0"/>
+              </a:spcBef>
+              <a:spcAft>
+                <a:spcPts val="0"/>
+              </a:spcAft>
+              <a:buNone/>
+            </a:pPr>
+            <a:r>
+              <a:rPr b="0" lang="en" sz="900" u="sng">
+                <a:solidFill>
+                  <a:schemeClr val="hlink"/>
+                </a:solidFill>
+                <a:hlinkClick r:id="rId5"/>
+              </a:rPr>
+              <a:t>https://oss.cs.fau.de</a:t>
+            </a:r>
+            <a:r>
+              <a:rPr b="0" lang="en" sz="900"/>
+              <a:t> </a:t>
+            </a:r>
+            <a:endParaRPr b="0" sz="900"/>
+          </a:p>
+        </p:txBody>
+      </p:sp>
+    </p:spTree>
+  </p:cSld>
+  <p:clrMapOvr>
+    <a:masterClrMapping/>
+  </p:clrMapOvr>
+</p:sld>
+</file>
+
+<file path=ppt/slides/slide48.xml><?xml version="1.0" encoding="utf-8"?>
+<p:sld xmlns:a="http://schemas.openxmlformats.org/drawingml/2006/main" xmlns:r="http://schemas.openxmlformats.org/officeDocument/2006/relationships" xmlns:mc="http://schemas.openxmlformats.org/markup-compatibility/2006" xmlns:mv="urn:schemas-microsoft-com:mac:vml" xmlns:p="http://schemas.openxmlformats.org/presentationml/2006/main" xmlns:c="http://schemas.openxmlformats.org/drawingml/2006/chart" xmlns:dgm="http://schemas.openxmlformats.org/drawingml/2006/diagram" xmlns:o="urn:schemas-microsoft-com:office:office" xmlns:v="urn:schemas-microsoft-com:vml" xmlns:pvml="urn:schemas-microsoft-com:office:powerpoint" xmlns:com="http://schemas.openxmlformats.org/drawingml/2006/compatibility" xmlns:p14="http://schemas.microsoft.com/office/powerpoint/2010/main" xmlns:p15="http://schemas.microsoft.com/office/powerpoint/2012/main" xmlns:ahyp="http://schemas.microsoft.com/office/drawing/2018/hyperlinkcolor">
+  <p:cSld>
+    <p:spTree>
+      <p:nvGrpSpPr>
+        <p:cNvPr id="415" name="Shape 415"/>
+        <p:cNvGrpSpPr/>
+        <p:nvPr/>
+      </p:nvGrpSpPr>
+      <p:grpSpPr>
+        <a:xfrm>
+          <a:off x="0" y="0"/>
+          <a:ext cx="0" cy="0"/>
+          <a:chOff x="0" y="0"/>
+          <a:chExt cx="0" cy="0"/>
+        </a:xfrm>
+      </p:grpSpPr>
+      <p:sp>
+        <p:nvSpPr>
+          <p:cNvPr id="416" name="Google Shape;416;p62"/>
+          <p:cNvSpPr txBox="1"/>
+          <p:nvPr>
+            <p:ph type="title"/>
+          </p:nvPr>
+        </p:nvSpPr>
+        <p:spPr>
+          <a:xfrm>
+            <a:off x="0" y="0"/>
+            <a:ext cx="9144000" cy="685800"/>
+          </a:xfrm>
+          <a:prstGeom prst="rect">
+            <a:avLst/>
+          </a:prstGeom>
+        </p:spPr>
+        <p:txBody>
+          <a:bodyPr anchorCtr="0" anchor="ctr" bIns="91425" lIns="274300" spcFirstLastPara="1" rIns="91425" wrap="square" tIns="91425">
+            <a:noAutofit/>
+          </a:bodyPr>
+          <a:lstStyle/>
+          <a:p>
+            <a:pPr indent="0" lvl="0" marL="0" rtl="0" algn="l">
+              <a:spcBef>
+                <a:spcPts val="0"/>
+              </a:spcBef>
+              <a:spcAft>
+                <a:spcPts val="0"/>
+              </a:spcAft>
+              <a:buNone/>
+            </a:pPr>
+            <a:r>
+              <a:rPr lang="en"/>
+              <a:t>License and Copyright Declaration in Files</a:t>
+            </a:r>
+            <a:endParaRPr/>
+          </a:p>
+        </p:txBody>
+      </p:sp>
+      <p:sp>
+        <p:nvSpPr>
+          <p:cNvPr id="417" name="Google Shape;417;p62"/>
           <p:cNvSpPr txBox="1"/>
           <p:nvPr>
             <p:ph idx="1" type="body"/>
@@ -27933,7 +28275,7 @@
       </p:sp>
       <p:sp>
         <p:nvSpPr>
-          <p:cNvPr id="411" name="Google Shape;411;p61"/>
+          <p:cNvPr id="418" name="Google Shape;418;p62"/>
           <p:cNvSpPr txBox="1"/>
           <p:nvPr>
             <p:ph idx="12" type="sldNum"/>
@@ -28006,7 +28348,7 @@
       </p:sp>
       <p:sp>
         <p:nvSpPr>
-          <p:cNvPr id="412" name="Google Shape;412;p61"/>
+          <p:cNvPr id="419" name="Google Shape;419;p62"/>
           <p:cNvSpPr txBox="1"/>
           <p:nvPr/>
         </p:nvSpPr>
@@ -28061,7 +28403,7 @@
       </p:sp>
       <p:sp>
         <p:nvSpPr>
-          <p:cNvPr id="413" name="Google Shape;413;p61"/>
+          <p:cNvPr id="420" name="Google Shape;420;p62"/>
           <p:cNvSpPr txBox="1"/>
           <p:nvPr/>
         </p:nvSpPr>
@@ -28171,316 +28513,6 @@
               <a:cs typeface="Courier New"/>
               <a:sym typeface="Courier New"/>
             </a:endParaRPr>
-          </a:p>
-        </p:txBody>
-      </p:sp>
-    </p:spTree>
-  </p:cSld>
-  <p:clrMapOvr>
-    <a:masterClrMapping/>
-  </p:clrMapOvr>
-</p:sld>
-</file>
-
-<file path=ppt/slides/slide48.xml><?xml version="1.0" encoding="utf-8"?>
-<p:sld xmlns:a="http://schemas.openxmlformats.org/drawingml/2006/main" xmlns:r="http://schemas.openxmlformats.org/officeDocument/2006/relationships" xmlns:mc="http://schemas.openxmlformats.org/markup-compatibility/2006" xmlns:mv="urn:schemas-microsoft-com:mac:vml" xmlns:p="http://schemas.openxmlformats.org/presentationml/2006/main" xmlns:c="http://schemas.openxmlformats.org/drawingml/2006/chart" xmlns:dgm="http://schemas.openxmlformats.org/drawingml/2006/diagram" xmlns:o="urn:schemas-microsoft-com:office:office" xmlns:v="urn:schemas-microsoft-com:vml" xmlns:pvml="urn:schemas-microsoft-com:office:powerpoint" xmlns:com="http://schemas.openxmlformats.org/drawingml/2006/compatibility" xmlns:p14="http://schemas.microsoft.com/office/powerpoint/2010/main" xmlns:p15="http://schemas.microsoft.com/office/powerpoint/2012/main" xmlns:ahyp="http://schemas.microsoft.com/office/drawing/2018/hyperlinkcolor">
-  <p:cSld>
-    <p:spTree>
-      <p:nvGrpSpPr>
-        <p:cNvPr id="417" name="Shape 417"/>
-        <p:cNvGrpSpPr/>
-        <p:nvPr/>
-      </p:nvGrpSpPr>
-      <p:grpSpPr>
-        <a:xfrm>
-          <a:off x="0" y="0"/>
-          <a:ext cx="0" cy="0"/>
-          <a:chOff x="0" y="0"/>
-          <a:chExt cx="0" cy="0"/>
-        </a:xfrm>
-      </p:grpSpPr>
-      <p:sp>
-        <p:nvSpPr>
-          <p:cNvPr id="418" name="Google Shape;418;p62"/>
-          <p:cNvSpPr txBox="1"/>
-          <p:nvPr>
-            <p:ph type="title"/>
-          </p:nvPr>
-        </p:nvSpPr>
-        <p:spPr>
-          <a:xfrm>
-            <a:off x="0" y="0"/>
-            <a:ext cx="9144000" cy="685800"/>
-          </a:xfrm>
-          <a:prstGeom prst="rect">
-            <a:avLst/>
-          </a:prstGeom>
-        </p:spPr>
-        <p:txBody>
-          <a:bodyPr anchorCtr="0" anchor="ctr" bIns="91425" lIns="274300" spcFirstLastPara="1" rIns="91425" wrap="square" tIns="91425">
-            <a:noAutofit/>
-          </a:bodyPr>
-          <a:lstStyle/>
-          <a:p>
-            <a:pPr indent="0" lvl="0" marL="0" rtl="0" algn="l">
-              <a:spcBef>
-                <a:spcPts val="0"/>
-              </a:spcBef>
-              <a:spcAft>
-                <a:spcPts val="0"/>
-              </a:spcAft>
-              <a:buNone/>
-            </a:pPr>
-            <a:r>
-              <a:rPr lang="en"/>
-              <a:t>Open Source Governance</a:t>
-            </a:r>
-            <a:endParaRPr/>
-          </a:p>
-        </p:txBody>
-      </p:sp>
-      <p:sp>
-        <p:nvSpPr>
-          <p:cNvPr id="419" name="Google Shape;419;p62"/>
-          <p:cNvSpPr txBox="1"/>
-          <p:nvPr>
-            <p:ph idx="1" type="body"/>
-          </p:nvPr>
-        </p:nvSpPr>
-        <p:spPr>
-          <a:xfrm>
-            <a:off x="274320" y="914400"/>
-            <a:ext cx="8595300" cy="4114800"/>
-          </a:xfrm>
-          <a:prstGeom prst="rect">
-            <a:avLst/>
-          </a:prstGeom>
-        </p:spPr>
-        <p:txBody>
-          <a:bodyPr anchorCtr="0" anchor="t" bIns="0" lIns="0" spcFirstLastPara="1" rIns="0" wrap="square" tIns="0">
-            <a:noAutofit/>
-          </a:bodyPr>
-          <a:lstStyle/>
-          <a:p>
-            <a:pPr indent="0" lvl="0" marL="0" rtl="0" algn="l">
-              <a:spcBef>
-                <a:spcPts val="0"/>
-              </a:spcBef>
-              <a:spcAft>
-                <a:spcPts val="0"/>
-              </a:spcAft>
-              <a:buNone/>
-            </a:pPr>
-            <a:r>
-              <a:rPr lang="en"/>
-              <a:t>Do not add copyleft-licensed libraries to your project</a:t>
-            </a:r>
-            <a:endParaRPr/>
-          </a:p>
-          <a:p>
-            <a:pPr indent="0" lvl="0" marL="0" rtl="0" algn="l">
-              <a:spcBef>
-                <a:spcPts val="1200"/>
-              </a:spcBef>
-              <a:spcAft>
-                <a:spcPts val="0"/>
-              </a:spcAft>
-              <a:buNone/>
-            </a:pPr>
-            <a:r>
-              <a:rPr lang="en"/>
-              <a:t>Follow these rules of thumb on license choice</a:t>
-            </a:r>
-            <a:endParaRPr/>
-          </a:p>
-          <a:p>
-            <a:pPr indent="-342900" lvl="0" marL="457200" rtl="0" algn="l">
-              <a:spcBef>
-                <a:spcPts val="1200"/>
-              </a:spcBef>
-              <a:spcAft>
-                <a:spcPts val="0"/>
-              </a:spcAft>
-              <a:buSzPts val="1800"/>
-              <a:buChar char="●"/>
-            </a:pPr>
-            <a:r>
-              <a:rPr lang="en">
-                <a:highlight>
-                  <a:srgbClr val="D9EAD3"/>
-                </a:highlight>
-              </a:rPr>
-              <a:t>OK: Permissive licenses (MIT, BSD, Apache)</a:t>
-            </a:r>
-            <a:endParaRPr>
-              <a:highlight>
-                <a:srgbClr val="D9EAD3"/>
-              </a:highlight>
-            </a:endParaRPr>
-          </a:p>
-          <a:p>
-            <a:pPr indent="-342900" lvl="0" marL="457200" rtl="0" algn="l">
-              <a:spcBef>
-                <a:spcPts val="0"/>
-              </a:spcBef>
-              <a:spcAft>
-                <a:spcPts val="0"/>
-              </a:spcAft>
-              <a:buSzPts val="1800"/>
-              <a:buChar char="●"/>
-            </a:pPr>
-            <a:r>
-              <a:rPr lang="en">
-                <a:highlight>
-                  <a:srgbClr val="FFF2CC"/>
-                </a:highlight>
-              </a:rPr>
-              <a:t>May be OK: Weakly protective (a.k.a. “weak copyleft”)</a:t>
-            </a:r>
-            <a:endParaRPr>
-              <a:highlight>
-                <a:srgbClr val="FFF2CC"/>
-              </a:highlight>
-            </a:endParaRPr>
-          </a:p>
-          <a:p>
-            <a:pPr indent="-342900" lvl="0" marL="457200" rtl="0" algn="l">
-              <a:spcBef>
-                <a:spcPts val="0"/>
-              </a:spcBef>
-              <a:spcAft>
-                <a:spcPts val="0"/>
-              </a:spcAft>
-              <a:buSzPts val="1800"/>
-              <a:buChar char="●"/>
-            </a:pPr>
-            <a:r>
-              <a:rPr lang="en">
-                <a:highlight>
-                  <a:srgbClr val="F4CCCC"/>
-                </a:highlight>
-              </a:rPr>
-              <a:t>Usually not OK: Strongly protective (a.k.a. “reciprocal” or “copyleft”)</a:t>
-            </a:r>
-            <a:endParaRPr>
-              <a:highlight>
-                <a:srgbClr val="F4CCCC"/>
-              </a:highlight>
-            </a:endParaRPr>
-          </a:p>
-          <a:p>
-            <a:pPr indent="-342900" lvl="0" marL="457200" rtl="0" algn="l">
-              <a:spcBef>
-                <a:spcPts val="0"/>
-              </a:spcBef>
-              <a:spcAft>
-                <a:spcPts val="0"/>
-              </a:spcAft>
-              <a:buSzPts val="1800"/>
-              <a:buChar char="●"/>
-            </a:pPr>
-            <a:r>
-              <a:rPr lang="en">
-                <a:highlight>
-                  <a:srgbClr val="CCCCCC"/>
-                </a:highlight>
-              </a:rPr>
-              <a:t>Never OK: Non-software licenses, no license</a:t>
-            </a:r>
-            <a:endParaRPr>
-              <a:highlight>
-                <a:srgbClr val="CCCCCC"/>
-              </a:highlight>
-            </a:endParaRPr>
-          </a:p>
-          <a:p>
-            <a:pPr indent="0" lvl="0" marL="0" rtl="0" algn="l">
-              <a:spcBef>
-                <a:spcPts val="1200"/>
-              </a:spcBef>
-              <a:spcAft>
-                <a:spcPts val="1200"/>
-              </a:spcAft>
-              <a:buNone/>
-            </a:pPr>
-            <a:r>
-              <a:rPr lang="en"/>
-              <a:t>Professionals (i.e. companies) use code analyzers to check</a:t>
-            </a:r>
-            <a:endParaRPr/>
-          </a:p>
-        </p:txBody>
-      </p:sp>
-      <p:sp>
-        <p:nvSpPr>
-          <p:cNvPr id="420" name="Google Shape;420;p62"/>
-          <p:cNvSpPr txBox="1"/>
-          <p:nvPr>
-            <p:ph idx="12" type="sldNum"/>
-          </p:nvPr>
-        </p:nvSpPr>
-        <p:spPr>
-          <a:xfrm>
-            <a:off x="7315202" y="4416550"/>
-            <a:ext cx="1828800" cy="731400"/>
-          </a:xfrm>
-          <a:prstGeom prst="rect">
-            <a:avLst/>
-          </a:prstGeom>
-        </p:spPr>
-        <p:txBody>
-          <a:bodyPr anchorCtr="0" anchor="b" bIns="91425" lIns="91425" spcFirstLastPara="1" rIns="91425" wrap="square" tIns="91425">
-            <a:noAutofit/>
-          </a:bodyPr>
-          <a:lstStyle/>
-          <a:p>
-            <a:pPr indent="0" lvl="0" marL="0" rtl="0" algn="r">
-              <a:spcBef>
-                <a:spcPts val="0"/>
-              </a:spcBef>
-              <a:spcAft>
-                <a:spcPts val="0"/>
-              </a:spcAft>
-              <a:buNone/>
-            </a:pPr>
-            <a:fld id="{00000000-1234-1234-1234-123412341234}" type="slidenum">
-              <a:rPr lang="en">
-                <a:solidFill>
-                  <a:schemeClr val="dk1"/>
-                </a:solidFill>
-              </a:rPr>
-              <a:t>‹#›</a:t>
-            </a:fld>
-            <a:endParaRPr>
-              <a:solidFill>
-                <a:schemeClr val="dk1"/>
-              </a:solidFill>
-            </a:endParaRPr>
-          </a:p>
-          <a:p>
-            <a:pPr indent="0" lvl="0" marL="0" rtl="0" algn="r">
-              <a:spcBef>
-                <a:spcPts val="0"/>
-              </a:spcBef>
-              <a:spcAft>
-                <a:spcPts val="0"/>
-              </a:spcAft>
-              <a:buNone/>
-            </a:pPr>
-            <a:r>
-              <a:rPr b="0" lang="en" sz="900" u="sng">
-                <a:solidFill>
-                  <a:schemeClr val="hlink"/>
-                </a:solidFill>
-                <a:hlinkClick r:id="rId3"/>
-              </a:rPr>
-              <a:t>https://oss.cs.fau.de</a:t>
-            </a:r>
-            <a:r>
-              <a:rPr b="0" lang="en" sz="900"/>
-              <a:t> </a:t>
-            </a:r>
-            <a:endParaRPr b="0" sz="900"/>
           </a:p>
         </p:txBody>
       </p:sp>
@@ -28519,20 +28551,20 @@
         </p:nvSpPr>
         <p:spPr>
           <a:xfrm>
-            <a:off x="0" y="-7"/>
-            <a:ext cx="9144000" cy="2386500"/>
+            <a:off x="0" y="0"/>
+            <a:ext cx="9144000" cy="685800"/>
           </a:xfrm>
           <a:prstGeom prst="rect">
             <a:avLst/>
           </a:prstGeom>
         </p:spPr>
         <p:txBody>
-          <a:bodyPr anchorCtr="0" anchor="b" bIns="274300" lIns="91425" spcFirstLastPara="1" rIns="91425" wrap="square" tIns="91425">
+          <a:bodyPr anchorCtr="0" anchor="ctr" bIns="91425" lIns="274300" spcFirstLastPara="1" rIns="91425" wrap="square" tIns="91425">
             <a:noAutofit/>
           </a:bodyPr>
           <a:lstStyle/>
           <a:p>
-            <a:pPr indent="0" lvl="0" marL="0" rtl="0" algn="ctr">
+            <a:pPr indent="0" lvl="0" marL="0" rtl="0" algn="l">
               <a:spcBef>
                 <a:spcPts val="0"/>
               </a:spcBef>
@@ -28543,9 +28575,254 @@
             </a:pPr>
             <a:r>
               <a:rPr lang="en"/>
-              <a:t>7. Imp-Squared Backlog</a:t>
-            </a:r>
-            <a:endParaRPr/>
+              <a:t>Open Source Governance</a:t>
+            </a:r>
+            <a:endParaRPr/>
+          </a:p>
+        </p:txBody>
+      </p:sp>
+      <p:sp>
+        <p:nvSpPr>
+          <p:cNvPr id="426" name="Google Shape;426;p63"/>
+          <p:cNvSpPr txBox="1"/>
+          <p:nvPr>
+            <p:ph idx="1" type="body"/>
+          </p:nvPr>
+        </p:nvSpPr>
+        <p:spPr>
+          <a:xfrm>
+            <a:off x="274320" y="914400"/>
+            <a:ext cx="8595300" cy="4114800"/>
+          </a:xfrm>
+          <a:prstGeom prst="rect">
+            <a:avLst/>
+          </a:prstGeom>
+        </p:spPr>
+        <p:txBody>
+          <a:bodyPr anchorCtr="0" anchor="t" bIns="0" lIns="0" spcFirstLastPara="1" rIns="0" wrap="square" tIns="0">
+            <a:noAutofit/>
+          </a:bodyPr>
+          <a:lstStyle/>
+          <a:p>
+            <a:pPr indent="0" lvl="0" marL="0" rtl="0" algn="l">
+              <a:spcBef>
+                <a:spcPts val="0"/>
+              </a:spcBef>
+              <a:spcAft>
+                <a:spcPts val="0"/>
+              </a:spcAft>
+              <a:buNone/>
+            </a:pPr>
+            <a:r>
+              <a:rPr lang="en"/>
+              <a:t>Do not add copyleft-licensed libraries to your project</a:t>
+            </a:r>
+            <a:endParaRPr/>
+          </a:p>
+          <a:p>
+            <a:pPr indent="0" lvl="0" marL="0" rtl="0" algn="l">
+              <a:spcBef>
+                <a:spcPts val="1200"/>
+              </a:spcBef>
+              <a:spcAft>
+                <a:spcPts val="0"/>
+              </a:spcAft>
+              <a:buNone/>
+            </a:pPr>
+            <a:r>
+              <a:rPr lang="en"/>
+              <a:t>Follow these rules of thumb on license choice</a:t>
+            </a:r>
+            <a:endParaRPr/>
+          </a:p>
+          <a:p>
+            <a:pPr indent="-342900" lvl="0" marL="457200" rtl="0" algn="l">
+              <a:spcBef>
+                <a:spcPts val="1200"/>
+              </a:spcBef>
+              <a:spcAft>
+                <a:spcPts val="0"/>
+              </a:spcAft>
+              <a:buSzPts val="1800"/>
+              <a:buChar char="●"/>
+            </a:pPr>
+            <a:r>
+              <a:rPr lang="en">
+                <a:highlight>
+                  <a:srgbClr val="D9EAD3"/>
+                </a:highlight>
+              </a:rPr>
+              <a:t>OK: Permissive licenses (MIT, BSD, Apache)</a:t>
+            </a:r>
+            <a:endParaRPr>
+              <a:highlight>
+                <a:srgbClr val="D9EAD3"/>
+              </a:highlight>
+            </a:endParaRPr>
+          </a:p>
+          <a:p>
+            <a:pPr indent="-342900" lvl="0" marL="457200" rtl="0" algn="l">
+              <a:spcBef>
+                <a:spcPts val="0"/>
+              </a:spcBef>
+              <a:spcAft>
+                <a:spcPts val="0"/>
+              </a:spcAft>
+              <a:buSzPts val="1800"/>
+              <a:buChar char="●"/>
+            </a:pPr>
+            <a:r>
+              <a:rPr lang="en">
+                <a:highlight>
+                  <a:srgbClr val="FFF2CC"/>
+                </a:highlight>
+              </a:rPr>
+              <a:t>May be OK: Weakly protective (a.k.a. “weak copyleft”)</a:t>
+            </a:r>
+            <a:endParaRPr>
+              <a:highlight>
+                <a:srgbClr val="FFF2CC"/>
+              </a:highlight>
+            </a:endParaRPr>
+          </a:p>
+          <a:p>
+            <a:pPr indent="-342900" lvl="0" marL="457200" rtl="0" algn="l">
+              <a:spcBef>
+                <a:spcPts val="0"/>
+              </a:spcBef>
+              <a:spcAft>
+                <a:spcPts val="0"/>
+              </a:spcAft>
+              <a:buSzPts val="1800"/>
+              <a:buChar char="●"/>
+            </a:pPr>
+            <a:r>
+              <a:rPr lang="en">
+                <a:highlight>
+                  <a:srgbClr val="F4CCCC"/>
+                </a:highlight>
+              </a:rPr>
+              <a:t>Usually not OK: Strongly protective (a.k.a. “reciprocal” or “copyleft”)</a:t>
+            </a:r>
+            <a:endParaRPr>
+              <a:highlight>
+                <a:srgbClr val="F4CCCC"/>
+              </a:highlight>
+            </a:endParaRPr>
+          </a:p>
+          <a:p>
+            <a:pPr indent="-342900" lvl="0" marL="457200" rtl="0" algn="l">
+              <a:spcBef>
+                <a:spcPts val="0"/>
+              </a:spcBef>
+              <a:spcAft>
+                <a:spcPts val="0"/>
+              </a:spcAft>
+              <a:buSzPts val="1800"/>
+              <a:buChar char="●"/>
+            </a:pPr>
+            <a:r>
+              <a:rPr lang="en">
+                <a:highlight>
+                  <a:srgbClr val="CCCCCC"/>
+                </a:highlight>
+              </a:rPr>
+              <a:t>Never OK: Non-software licenses, no license</a:t>
+            </a:r>
+            <a:endParaRPr>
+              <a:highlight>
+                <a:srgbClr val="CCCCCC"/>
+              </a:highlight>
+            </a:endParaRPr>
+          </a:p>
+          <a:p>
+            <a:pPr indent="0" lvl="0" marL="0" rtl="0" algn="l">
+              <a:spcBef>
+                <a:spcPts val="1200"/>
+              </a:spcBef>
+              <a:spcAft>
+                <a:spcPts val="1200"/>
+              </a:spcAft>
+              <a:buNone/>
+            </a:pPr>
+            <a:r>
+              <a:rPr lang="en"/>
+              <a:t>Professionals (i.e. companies) use code analyzers to check</a:t>
+            </a:r>
+            <a:endParaRPr/>
+          </a:p>
+        </p:txBody>
+      </p:sp>
+      <p:sp>
+        <p:nvSpPr>
+          <p:cNvPr id="427" name="Google Shape;427;p63"/>
+          <p:cNvSpPr txBox="1"/>
+          <p:nvPr>
+            <p:ph idx="12" type="sldNum"/>
+          </p:nvPr>
+        </p:nvSpPr>
+        <p:spPr>
+          <a:xfrm>
+            <a:off x="7315202" y="4416550"/>
+            <a:ext cx="1828800" cy="731400"/>
+          </a:xfrm>
+          <a:prstGeom prst="rect">
+            <a:avLst/>
+          </a:prstGeom>
+        </p:spPr>
+        <p:txBody>
+          <a:bodyPr anchorCtr="0" anchor="b" bIns="91425" lIns="91425" spcFirstLastPara="1" rIns="91425" wrap="square" tIns="91425">
+            <a:noAutofit/>
+          </a:bodyPr>
+          <a:lstStyle/>
+          <a:p>
+            <a:pPr indent="0" lvl="0" marL="0" rtl="0" algn="r">
+              <a:spcBef>
+                <a:spcPts val="0"/>
+              </a:spcBef>
+              <a:spcAft>
+                <a:spcPts val="0"/>
+              </a:spcAft>
+              <a:buNone/>
+            </a:pPr>
+            <a:fld id="{00000000-1234-1234-1234-123412341234}" type="slidenum">
+              <a:rPr lang="en">
+                <a:solidFill>
+                  <a:schemeClr val="dk1"/>
+                </a:solidFill>
+              </a:rPr>
+              <a:t>‹#›</a:t>
+            </a:fld>
+            <a:endParaRPr>
+              <a:solidFill>
+                <a:schemeClr val="dk1"/>
+              </a:solidFill>
+            </a:endParaRPr>
+          </a:p>
+          <a:p>
+            <a:pPr indent="0" lvl="0" marL="0" rtl="0" algn="r">
+              <a:spcBef>
+                <a:spcPts val="0"/>
+              </a:spcBef>
+              <a:spcAft>
+                <a:spcPts val="0"/>
+              </a:spcAft>
+              <a:buNone/>
+            </a:pPr>
+            <a:r>
+              <a:rPr b="0" lang="en" sz="900" u="sng">
+                <a:solidFill>
+                  <a:schemeClr val="hlink"/>
+                </a:solidFill>
+                <a:hlinkClick r:id="rId3"/>
+              </a:rPr>
+              <a:t>https://oss.cs.fau.de</a:t>
+            </a:r>
+            <a:r>
+              <a:rPr b="0" lang="en" sz="900"/>
+              <a:t> </a:t>
+            </a:r>
+            <a:endParaRPr b="0" sz="900"/>
           </a:p>
         </p:txBody>
       </p:sp>
@@ -28728,7 +29005,7 @@
   <p:cSld>
     <p:spTree>
       <p:nvGrpSpPr>
-        <p:cNvPr id="429" name="Shape 429"/>
+        <p:cNvPr id="431" name="Shape 431"/>
         <p:cNvGrpSpPr/>
         <p:nvPr/>
       </p:nvGrpSpPr>
@@ -28742,7 +29019,7 @@
       </p:grpSpPr>
       <p:sp>
         <p:nvSpPr>
-          <p:cNvPr id="430" name="Google Shape;430;p64"/>
+          <p:cNvPr id="432" name="Google Shape;432;p64"/>
           <p:cNvSpPr txBox="1"/>
           <p:nvPr>
             <p:ph type="title"/>
@@ -28750,20 +29027,20 @@
         </p:nvSpPr>
         <p:spPr>
           <a:xfrm>
-            <a:off x="0" y="0"/>
-            <a:ext cx="9144000" cy="685800"/>
+            <a:off x="0" y="-7"/>
+            <a:ext cx="9144000" cy="2386500"/>
           </a:xfrm>
           <a:prstGeom prst="rect">
             <a:avLst/>
           </a:prstGeom>
         </p:spPr>
         <p:txBody>
-          <a:bodyPr anchorCtr="0" anchor="ctr" bIns="91425" lIns="274300" spcFirstLastPara="1" rIns="91425" wrap="square" tIns="91425">
+          <a:bodyPr anchorCtr="0" anchor="b" bIns="274300" lIns="91425" spcFirstLastPara="1" rIns="91425" wrap="square" tIns="91425">
             <a:noAutofit/>
           </a:bodyPr>
           <a:lstStyle/>
           <a:p>
-            <a:pPr indent="0" lvl="0" marL="0" rtl="0" algn="l">
+            <a:pPr indent="0" lvl="0" marL="0" rtl="0" algn="ctr">
               <a:spcBef>
                 <a:spcPts val="0"/>
               </a:spcBef>
@@ -28774,220 +29051,9 @@
             </a:pPr>
             <a:r>
               <a:rPr lang="en"/>
-              <a:t>Impediments and Improvements (Imp-Squared) Backlog</a:t>
-            </a:r>
-            <a:endParaRPr/>
-          </a:p>
-        </p:txBody>
-      </p:sp>
-      <p:sp>
-        <p:nvSpPr>
-          <p:cNvPr id="431" name="Google Shape;431;p64"/>
-          <p:cNvSpPr txBox="1"/>
-          <p:nvPr>
-            <p:ph idx="1" type="body"/>
-          </p:nvPr>
-        </p:nvSpPr>
-        <p:spPr>
-          <a:xfrm>
-            <a:off x="274320" y="914400"/>
-            <a:ext cx="8595300" cy="4114800"/>
-          </a:xfrm>
-          <a:prstGeom prst="rect">
-            <a:avLst/>
-          </a:prstGeom>
-        </p:spPr>
-        <p:txBody>
-          <a:bodyPr anchorCtr="0" anchor="t" bIns="0" lIns="0" spcFirstLastPara="1" rIns="0" wrap="square" tIns="0">
-            <a:noAutofit/>
-          </a:bodyPr>
-          <a:lstStyle/>
-          <a:p>
-            <a:pPr indent="0" lvl="0" marL="0" rtl="0" algn="l">
-              <a:spcBef>
-                <a:spcPts val="0"/>
-              </a:spcBef>
-              <a:spcAft>
-                <a:spcPts val="0"/>
-              </a:spcAft>
-              <a:buNone/>
-            </a:pPr>
-            <a:r>
-              <a:rPr lang="en"/>
-              <a:t>The imp-squared backlog is a slotting system used to</a:t>
-            </a:r>
-            <a:endParaRPr/>
-          </a:p>
-          <a:p>
-            <a:pPr indent="-342900" lvl="0" marL="457200" rtl="0" algn="l">
-              <a:spcBef>
-                <a:spcPts val="1200"/>
-              </a:spcBef>
-              <a:spcAft>
-                <a:spcPts val="0"/>
-              </a:spcAft>
-              <a:buSzPts val="1800"/>
-              <a:buChar char="●"/>
-            </a:pPr>
-            <a:r>
-              <a:rPr lang="en"/>
-              <a:t>Manage the processing state of project impediments and improvements</a:t>
-            </a:r>
-            <a:endParaRPr/>
-          </a:p>
-          <a:p>
-            <a:pPr indent="0" lvl="0" marL="0" rtl="0" algn="l">
-              <a:spcBef>
-                <a:spcPts val="1200"/>
-              </a:spcBef>
-              <a:spcAft>
-                <a:spcPts val="0"/>
-              </a:spcAft>
-              <a:buNone/>
-            </a:pPr>
-            <a:r>
-              <a:rPr lang="en"/>
-              <a:t>Impediments are non-technical problems that are</a:t>
-            </a:r>
-            <a:endParaRPr/>
-          </a:p>
-          <a:p>
-            <a:pPr indent="-342900" lvl="0" marL="457200" rtl="0" algn="l">
-              <a:spcBef>
-                <a:spcPts val="1200"/>
-              </a:spcBef>
-              <a:spcAft>
-                <a:spcPts val="0"/>
-              </a:spcAft>
-              <a:buSzPts val="1800"/>
-              <a:buChar char="●"/>
-            </a:pPr>
-            <a:r>
-              <a:rPr lang="en"/>
-              <a:t>Holding the team and project back</a:t>
-            </a:r>
-            <a:endParaRPr/>
-          </a:p>
-          <a:p>
-            <a:pPr indent="0" lvl="0" marL="0" rtl="0" algn="l">
-              <a:spcBef>
-                <a:spcPts val="1200"/>
-              </a:spcBef>
-              <a:spcAft>
-                <a:spcPts val="0"/>
-              </a:spcAft>
-              <a:buNone/>
-            </a:pPr>
-            <a:r>
-              <a:rPr lang="en"/>
-              <a:t>Improvements are non-technical desires to</a:t>
-            </a:r>
-            <a:endParaRPr/>
-          </a:p>
-          <a:p>
-            <a:pPr indent="-342900" lvl="0" marL="457200" rtl="0" algn="l">
-              <a:spcBef>
-                <a:spcPts val="1200"/>
-              </a:spcBef>
-              <a:spcAft>
-                <a:spcPts val="0"/>
-              </a:spcAft>
-              <a:buSzPts val="1800"/>
-              <a:buChar char="●"/>
-            </a:pPr>
-            <a:r>
-              <a:rPr lang="en"/>
-              <a:t>Improve team performance</a:t>
-            </a:r>
-            <a:endParaRPr/>
-          </a:p>
-          <a:p>
-            <a:pPr indent="0" lvl="0" marL="0" rtl="0" algn="l">
-              <a:spcBef>
-                <a:spcPts val="1200"/>
-              </a:spcBef>
-              <a:spcAft>
-                <a:spcPts val="1200"/>
-              </a:spcAft>
-              <a:buNone/>
-            </a:pPr>
-            <a:r>
-              <a:t/>
-            </a:r>
-            <a:endParaRPr/>
-          </a:p>
-        </p:txBody>
-      </p:sp>
-      <p:sp>
-        <p:nvSpPr>
-          <p:cNvPr id="432" name="Google Shape;432;p64"/>
-          <p:cNvSpPr txBox="1"/>
-          <p:nvPr>
-            <p:ph idx="12" type="sldNum"/>
-          </p:nvPr>
-        </p:nvSpPr>
-        <p:spPr>
-          <a:xfrm>
-            <a:off x="7315202" y="4416550"/>
-            <a:ext cx="1828800" cy="731400"/>
-          </a:xfrm>
-          <a:prstGeom prst="rect">
-            <a:avLst/>
-          </a:prstGeom>
-        </p:spPr>
-        <p:txBody>
-          <a:bodyPr anchorCtr="0" anchor="b" bIns="91425" lIns="91425" spcFirstLastPara="1" rIns="91425" wrap="square" tIns="91425">
-            <a:noAutofit/>
-          </a:bodyPr>
-          <a:lstStyle/>
-          <a:p>
-            <a:pPr indent="0" lvl="0" marL="0" rtl="0" algn="r">
-              <a:spcBef>
-                <a:spcPts val="0"/>
-              </a:spcBef>
-              <a:spcAft>
-                <a:spcPts val="0"/>
-              </a:spcAft>
-              <a:buNone/>
-            </a:pPr>
-            <a:fld id="{00000000-1234-1234-1234-123412341234}" type="slidenum">
-              <a:rPr lang="en">
-                <a:solidFill>
-                  <a:schemeClr val="dk1"/>
-                </a:solidFill>
-              </a:rPr>
-              <a:t>‹#›</a:t>
-            </a:fld>
-            <a:endParaRPr>
-              <a:solidFill>
-                <a:schemeClr val="dk1"/>
-              </a:solidFill>
-            </a:endParaRPr>
-          </a:p>
-          <a:p>
-            <a:pPr indent="0" lvl="0" marL="0" rtl="0" algn="r">
-              <a:spcBef>
-                <a:spcPts val="0"/>
-              </a:spcBef>
-              <a:spcAft>
-                <a:spcPts val="0"/>
-              </a:spcAft>
-              <a:buNone/>
-            </a:pPr>
-            <a:r>
-              <a:rPr b="0" lang="en" sz="900" u="sng">
-                <a:solidFill>
-                  <a:schemeClr val="hlink"/>
-                </a:solidFill>
-                <a:hlinkClick r:id="rId3"/>
-              </a:rPr>
-              <a:t>https://oss.cs.fau.de</a:t>
-            </a:r>
-            <a:r>
-              <a:rPr b="0" lang="en" sz="900"/>
-              <a:t> </a:t>
-            </a:r>
-            <a:endParaRPr b="0" sz="900"/>
+              <a:t>7. Imp-Squared Backlog</a:t>
+            </a:r>
+            <a:endParaRPr/>
           </a:p>
         </p:txBody>
       </p:sp>
@@ -29016,34 +29082,257 @@
           <a:chExt cx="0" cy="0"/>
         </a:xfrm>
       </p:grpSpPr>
-      <p:pic>
-        <p:nvPicPr>
+      <p:sp>
+        <p:nvSpPr>
           <p:cNvPr id="437" name="Google Shape;437;p65"/>
-          <p:cNvPicPr preferRelativeResize="0"/>
-          <p:nvPr/>
-        </p:nvPicPr>
-        <p:blipFill>
-          <a:blip r:embed="rId3">
-            <a:alphaModFix/>
-          </a:blip>
-          <a:stretch>
-            <a:fillRect/>
-          </a:stretch>
-        </p:blipFill>
+          <p:cNvSpPr txBox="1"/>
+          <p:nvPr>
+            <p:ph type="title"/>
+          </p:nvPr>
+        </p:nvSpPr>
         <p:spPr>
           <a:xfrm>
             <a:off x="0" y="0"/>
-            <a:ext cx="9144000" cy="5120639"/>
+            <a:ext cx="9144000" cy="685800"/>
           </a:xfrm>
           <a:prstGeom prst="rect">
             <a:avLst/>
           </a:prstGeom>
-          <a:noFill/>
-          <a:ln>
-            <a:noFill/>
-          </a:ln>
         </p:spPr>
-      </p:pic>
+        <p:txBody>
+          <a:bodyPr anchorCtr="0" anchor="ctr" bIns="91425" lIns="274300" spcFirstLastPara="1" rIns="91425" wrap="square" tIns="91425">
+            <a:noAutofit/>
+          </a:bodyPr>
+          <a:lstStyle/>
+          <a:p>
+            <a:pPr indent="0" lvl="0" marL="0" rtl="0" algn="l">
+              <a:spcBef>
+                <a:spcPts val="0"/>
+              </a:spcBef>
+              <a:spcAft>
+                <a:spcPts val="0"/>
+              </a:spcAft>
+              <a:buNone/>
+            </a:pPr>
+            <a:r>
+              <a:rPr lang="en"/>
+              <a:t>Impediments and Improvements (Imp-Squared) Backlog</a:t>
+            </a:r>
+            <a:endParaRPr/>
+          </a:p>
+        </p:txBody>
+      </p:sp>
+      <p:sp>
+        <p:nvSpPr>
+          <p:cNvPr id="438" name="Google Shape;438;p65"/>
+          <p:cNvSpPr txBox="1"/>
+          <p:nvPr>
+            <p:ph idx="1" type="body"/>
+          </p:nvPr>
+        </p:nvSpPr>
+        <p:spPr>
+          <a:xfrm>
+            <a:off x="274320" y="914400"/>
+            <a:ext cx="8595300" cy="4114800"/>
+          </a:xfrm>
+          <a:prstGeom prst="rect">
+            <a:avLst/>
+          </a:prstGeom>
+        </p:spPr>
+        <p:txBody>
+          <a:bodyPr anchorCtr="0" anchor="t" bIns="0" lIns="0" spcFirstLastPara="1" rIns="0" wrap="square" tIns="0">
+            <a:noAutofit/>
+          </a:bodyPr>
+          <a:lstStyle/>
+          <a:p>
+            <a:pPr indent="0" lvl="0" marL="0" rtl="0" algn="l">
+              <a:spcBef>
+                <a:spcPts val="0"/>
+              </a:spcBef>
+              <a:spcAft>
+                <a:spcPts val="0"/>
+              </a:spcAft>
+              <a:buNone/>
+            </a:pPr>
+            <a:r>
+              <a:rPr lang="en"/>
+              <a:t>The imp-squared backlog is a slotting system used to</a:t>
+            </a:r>
+            <a:endParaRPr/>
+          </a:p>
+          <a:p>
+            <a:pPr indent="-342900" lvl="0" marL="457200" rtl="0" algn="l">
+              <a:spcBef>
+                <a:spcPts val="1200"/>
+              </a:spcBef>
+              <a:spcAft>
+                <a:spcPts val="0"/>
+              </a:spcAft>
+              <a:buSzPts val="1800"/>
+              <a:buChar char="●"/>
+            </a:pPr>
+            <a:r>
+              <a:rPr lang="en"/>
+              <a:t>Manage the processing state of project impediments and improvements</a:t>
+            </a:r>
+            <a:endParaRPr/>
+          </a:p>
+          <a:p>
+            <a:pPr indent="0" lvl="0" marL="0" rtl="0" algn="l">
+              <a:spcBef>
+                <a:spcPts val="1200"/>
+              </a:spcBef>
+              <a:spcAft>
+                <a:spcPts val="0"/>
+              </a:spcAft>
+              <a:buNone/>
+            </a:pPr>
+            <a:r>
+              <a:rPr lang="en"/>
+              <a:t>Impediments are non-technical problems that are</a:t>
+            </a:r>
+            <a:endParaRPr/>
+          </a:p>
+          <a:p>
+            <a:pPr indent="-342900" lvl="0" marL="457200" rtl="0" algn="l">
+              <a:spcBef>
+                <a:spcPts val="1200"/>
+              </a:spcBef>
+              <a:spcAft>
+                <a:spcPts val="0"/>
+              </a:spcAft>
+              <a:buSzPts val="1800"/>
+              <a:buChar char="●"/>
+            </a:pPr>
+            <a:r>
+              <a:rPr lang="en"/>
+              <a:t>Holding the team and project back</a:t>
+            </a:r>
+            <a:endParaRPr/>
+          </a:p>
+          <a:p>
+            <a:pPr indent="0" lvl="0" marL="0" rtl="0" algn="l">
+              <a:spcBef>
+                <a:spcPts val="1200"/>
+              </a:spcBef>
+              <a:spcAft>
+                <a:spcPts val="0"/>
+              </a:spcAft>
+              <a:buNone/>
+            </a:pPr>
+            <a:r>
+              <a:rPr lang="en"/>
+              <a:t>Improvements are non-technical desires to</a:t>
+            </a:r>
+            <a:endParaRPr/>
+          </a:p>
+          <a:p>
+            <a:pPr indent="-342900" lvl="0" marL="457200" rtl="0" algn="l">
+              <a:spcBef>
+                <a:spcPts val="1200"/>
+              </a:spcBef>
+              <a:spcAft>
+                <a:spcPts val="0"/>
+              </a:spcAft>
+              <a:buSzPts val="1800"/>
+              <a:buChar char="●"/>
+            </a:pPr>
+            <a:r>
+              <a:rPr lang="en"/>
+              <a:t>Improve team performance</a:t>
+            </a:r>
+            <a:endParaRPr/>
+          </a:p>
+          <a:p>
+            <a:pPr indent="0" lvl="0" marL="0" rtl="0" algn="l">
+              <a:spcBef>
+                <a:spcPts val="1200"/>
+              </a:spcBef>
+              <a:spcAft>
+                <a:spcPts val="1200"/>
+              </a:spcAft>
+              <a:buNone/>
+            </a:pPr>
+            <a:r>
+              <a:t/>
+            </a:r>
+            <a:endParaRPr/>
+          </a:p>
+        </p:txBody>
+      </p:sp>
+      <p:sp>
+        <p:nvSpPr>
+          <p:cNvPr id="439" name="Google Shape;439;p65"/>
+          <p:cNvSpPr txBox="1"/>
+          <p:nvPr>
+            <p:ph idx="12" type="sldNum"/>
+          </p:nvPr>
+        </p:nvSpPr>
+        <p:spPr>
+          <a:xfrm>
+            <a:off x="7315202" y="4416550"/>
+            <a:ext cx="1828800" cy="731400"/>
+          </a:xfrm>
+          <a:prstGeom prst="rect">
+            <a:avLst/>
+          </a:prstGeom>
+        </p:spPr>
+        <p:txBody>
+          <a:bodyPr anchorCtr="0" anchor="b" bIns="91425" lIns="91425" spcFirstLastPara="1" rIns="91425" wrap="square" tIns="91425">
+            <a:noAutofit/>
+          </a:bodyPr>
+          <a:lstStyle/>
+          <a:p>
+            <a:pPr indent="0" lvl="0" marL="0" rtl="0" algn="r">
+              <a:spcBef>
+                <a:spcPts val="0"/>
+              </a:spcBef>
+              <a:spcAft>
+                <a:spcPts val="0"/>
+              </a:spcAft>
+              <a:buNone/>
+            </a:pPr>
+            <a:fld id="{00000000-1234-1234-1234-123412341234}" type="slidenum">
+              <a:rPr lang="en">
+                <a:solidFill>
+                  <a:schemeClr val="dk1"/>
+                </a:solidFill>
+              </a:rPr>
+              <a:t>‹#›</a:t>
+            </a:fld>
+            <a:endParaRPr>
+              <a:solidFill>
+                <a:schemeClr val="dk1"/>
+              </a:solidFill>
+            </a:endParaRPr>
+          </a:p>
+          <a:p>
+            <a:pPr indent="0" lvl="0" marL="0" rtl="0" algn="r">
+              <a:spcBef>
+                <a:spcPts val="0"/>
+              </a:spcBef>
+              <a:spcAft>
+                <a:spcPts val="0"/>
+              </a:spcAft>
+              <a:buNone/>
+            </a:pPr>
+            <a:r>
+              <a:rPr b="0" lang="en" sz="900" u="sng">
+                <a:solidFill>
+                  <a:schemeClr val="hlink"/>
+                </a:solidFill>
+                <a:hlinkClick r:id="rId3"/>
+              </a:rPr>
+              <a:t>https://oss.cs.fau.de</a:t>
+            </a:r>
+            <a:r>
+              <a:rPr b="0" lang="en" sz="900"/>
+              <a:t> </a:t>
+            </a:r>
+            <a:endParaRPr b="0" sz="900"/>
+          </a:p>
+        </p:txBody>
+      </p:sp>
     </p:spTree>
   </p:cSld>
   <p:clrMapOvr>
@@ -29057,7 +29346,7 @@
   <p:cSld>
     <p:spTree>
       <p:nvGrpSpPr>
-        <p:cNvPr id="441" name="Shape 441"/>
+        <p:cNvPr id="443" name="Shape 443"/>
         <p:cNvGrpSpPr/>
         <p:nvPr/>
       </p:nvGrpSpPr>
@@ -29069,174 +29358,34 @@
           <a:chExt cx="0" cy="0"/>
         </a:xfrm>
       </p:grpSpPr>
-      <p:sp>
-        <p:nvSpPr>
-          <p:cNvPr id="442" name="Google Shape;442;p66"/>
-          <p:cNvSpPr txBox="1"/>
-          <p:nvPr>
-            <p:ph type="title"/>
-          </p:nvPr>
-        </p:nvSpPr>
+      <p:pic>
+        <p:nvPicPr>
+          <p:cNvPr id="444" name="Google Shape;444;p66"/>
+          <p:cNvPicPr preferRelativeResize="0"/>
+          <p:nvPr/>
+        </p:nvPicPr>
+        <p:blipFill>
+          <a:blip r:embed="rId3">
+            <a:alphaModFix/>
+          </a:blip>
+          <a:stretch>
+            <a:fillRect/>
+          </a:stretch>
+        </p:blipFill>
         <p:spPr>
           <a:xfrm>
             <a:off x="0" y="0"/>
-            <a:ext cx="9144000" cy="685800"/>
+            <a:ext cx="9144000" cy="5120639"/>
           </a:xfrm>
           <a:prstGeom prst="rect">
             <a:avLst/>
           </a:prstGeom>
+          <a:noFill/>
+          <a:ln>
+            <a:noFill/>
+          </a:ln>
         </p:spPr>
-        <p:txBody>
-          <a:bodyPr anchorCtr="0" anchor="ctr" bIns="91425" lIns="274300" spcFirstLastPara="1" rIns="91425" wrap="square" tIns="91425">
-            <a:noAutofit/>
-          </a:bodyPr>
-          <a:lstStyle/>
-          <a:p>
-            <a:pPr indent="0" lvl="0" marL="0" rtl="0" algn="l">
-              <a:spcBef>
-                <a:spcPts val="0"/>
-              </a:spcBef>
-              <a:spcAft>
-                <a:spcPts val="0"/>
-              </a:spcAft>
-              <a:buNone/>
-            </a:pPr>
-            <a:r>
-              <a:rPr lang="en"/>
-              <a:t>Regular Deliverable: Imp-Squared Backlog</a:t>
-            </a:r>
-            <a:endParaRPr/>
-          </a:p>
-        </p:txBody>
-      </p:sp>
-      <p:sp>
-        <p:nvSpPr>
-          <p:cNvPr id="443" name="Google Shape;443;p66"/>
-          <p:cNvSpPr txBox="1"/>
-          <p:nvPr>
-            <p:ph idx="1" type="body"/>
-          </p:nvPr>
-        </p:nvSpPr>
-        <p:spPr>
-          <a:xfrm>
-            <a:off x="274320" y="914400"/>
-            <a:ext cx="8595300" cy="4114800"/>
-          </a:xfrm>
-          <a:prstGeom prst="rect">
-            <a:avLst/>
-          </a:prstGeom>
-        </p:spPr>
-        <p:txBody>
-          <a:bodyPr anchorCtr="0" anchor="t" bIns="0" lIns="0" spcFirstLastPara="1" rIns="0" wrap="square" tIns="0">
-            <a:noAutofit/>
-          </a:bodyPr>
-          <a:lstStyle/>
-          <a:p>
-            <a:pPr indent="0" lvl="0" marL="0" rtl="0" algn="l">
-              <a:spcBef>
-                <a:spcPts val="0"/>
-              </a:spcBef>
-              <a:spcAft>
-                <a:spcPts val="0"/>
-              </a:spcAft>
-              <a:buNone/>
-            </a:pPr>
-            <a:r>
-              <a:rPr lang="en"/>
-              <a:t>Please initialize your imp-squared backlog and keep it up-to-date</a:t>
-            </a:r>
-            <a:endParaRPr/>
-          </a:p>
-          <a:p>
-            <a:pPr indent="0" lvl="0" marL="0" rtl="0" algn="l">
-              <a:spcBef>
-                <a:spcPts val="1200"/>
-              </a:spcBef>
-              <a:spcAft>
-                <a:spcPts val="1200"/>
-              </a:spcAft>
-              <a:buNone/>
-            </a:pPr>
-            <a:r>
-              <a:t/>
-            </a:r>
-            <a:endParaRPr strike="sngStrike"/>
-          </a:p>
-        </p:txBody>
-      </p:sp>
-      <p:sp>
-        <p:nvSpPr>
-          <p:cNvPr id="444" name="Google Shape;444;p66"/>
-          <p:cNvSpPr txBox="1"/>
-          <p:nvPr>
-            <p:ph idx="12" type="sldNum"/>
-          </p:nvPr>
-        </p:nvSpPr>
-        <p:spPr>
-          <a:xfrm>
-            <a:off x="7315202" y="4416550"/>
-            <a:ext cx="1828800" cy="731400"/>
-          </a:xfrm>
-          <a:prstGeom prst="rect">
-            <a:avLst/>
-          </a:prstGeom>
-        </p:spPr>
-        <p:txBody>
-          <a:bodyPr anchorCtr="0" anchor="b" bIns="91425" lIns="91425" spcFirstLastPara="1" rIns="91425" wrap="square" tIns="91425">
-            <a:noAutofit/>
-          </a:bodyPr>
-          <a:lstStyle/>
-          <a:p>
-            <a:pPr indent="0" lvl="0" marL="0" rtl="0" algn="r">
-              <a:spcBef>
-                <a:spcPts val="0"/>
-              </a:spcBef>
-              <a:spcAft>
-                <a:spcPts val="0"/>
-              </a:spcAft>
-              <a:buNone/>
-            </a:pPr>
-            <a:fld id="{00000000-1234-1234-1234-123412341234}" type="slidenum">
-              <a:rPr lang="en">
-                <a:solidFill>
-                  <a:schemeClr val="dk1"/>
-                </a:solidFill>
-              </a:rPr>
-              <a:t>‹#›</a:t>
-            </a:fld>
-            <a:endParaRPr>
-              <a:solidFill>
-                <a:schemeClr val="dk1"/>
-              </a:solidFill>
-            </a:endParaRPr>
-          </a:p>
-          <a:p>
-            <a:pPr indent="0" lvl="0" marL="0" rtl="0" algn="r">
-              <a:spcBef>
-                <a:spcPts val="0"/>
-              </a:spcBef>
-              <a:spcAft>
-                <a:spcPts val="0"/>
-              </a:spcAft>
-              <a:buNone/>
-            </a:pPr>
-            <a:r>
-              <a:rPr b="0" lang="en" sz="900" u="sng">
-                <a:solidFill>
-                  <a:schemeClr val="hlink"/>
-                </a:solidFill>
-                <a:hlinkClick r:id="rId3"/>
-              </a:rPr>
-              <a:t>https://oss.cs.fau.de</a:t>
-            </a:r>
-            <a:r>
-              <a:rPr b="0" lang="en" sz="900"/>
-              <a:t> </a:t>
-            </a:r>
-            <a:endParaRPr b="0" sz="900"/>
-          </a:p>
-        </p:txBody>
-      </p:sp>
+      </p:pic>
     </p:spTree>
   </p:cSld>
   <p:clrMapOvr>
@@ -29272,20 +29421,20 @@
         </p:nvSpPr>
         <p:spPr>
           <a:xfrm>
-            <a:off x="0" y="-7"/>
-            <a:ext cx="9144000" cy="2386500"/>
+            <a:off x="0" y="0"/>
+            <a:ext cx="9144000" cy="685800"/>
           </a:xfrm>
           <a:prstGeom prst="rect">
             <a:avLst/>
           </a:prstGeom>
         </p:spPr>
         <p:txBody>
-          <a:bodyPr anchorCtr="0" anchor="b" bIns="274300" lIns="91425" spcFirstLastPara="1" rIns="91425" wrap="square" tIns="91425">
+          <a:bodyPr anchorCtr="0" anchor="ctr" bIns="91425" lIns="274300" spcFirstLastPara="1" rIns="91425" wrap="square" tIns="91425">
             <a:noAutofit/>
           </a:bodyPr>
           <a:lstStyle/>
           <a:p>
-            <a:pPr indent="0" lvl="0" marL="0" rtl="0" algn="ctr">
+            <a:pPr indent="0" lvl="0" marL="0" rtl="0" algn="l">
               <a:spcBef>
                 <a:spcPts val="0"/>
               </a:spcBef>
@@ -29296,13 +29445,137 @@
             </a:pPr>
             <a:r>
               <a:rPr lang="en"/>
-              <a:t>8</a:t>
-            </a:r>
+              <a:t>Regular Deliverable: Imp-Squared Backlog</a:t>
+            </a:r>
+            <a:endParaRPr/>
+          </a:p>
+        </p:txBody>
+      </p:sp>
+      <p:sp>
+        <p:nvSpPr>
+          <p:cNvPr id="450" name="Google Shape;450;p67"/>
+          <p:cNvSpPr txBox="1"/>
+          <p:nvPr>
+            <p:ph idx="1" type="body"/>
+          </p:nvPr>
+        </p:nvSpPr>
+        <p:spPr>
+          <a:xfrm>
+            <a:off x="274320" y="914400"/>
+            <a:ext cx="8595300" cy="4114800"/>
+          </a:xfrm>
+          <a:prstGeom prst="rect">
+            <a:avLst/>
+          </a:prstGeom>
+        </p:spPr>
+        <p:txBody>
+          <a:bodyPr anchorCtr="0" anchor="t" bIns="0" lIns="0" spcFirstLastPara="1" rIns="0" wrap="square" tIns="0">
+            <a:noAutofit/>
+          </a:bodyPr>
+          <a:lstStyle/>
+          <a:p>
+            <a:pPr indent="0" lvl="0" marL="0" rtl="0" algn="l">
+              <a:spcBef>
+                <a:spcPts val="0"/>
+              </a:spcBef>
+              <a:spcAft>
+                <a:spcPts val="0"/>
+              </a:spcAft>
+              <a:buNone/>
+            </a:pPr>
             <a:r>
               <a:rPr lang="en"/>
-              <a:t>. Stand-up Emails</a:t>
-            </a:r>
-            <a:endParaRPr/>
+              <a:t>Please initialize your imp-squared backlog and keep it up-to-date</a:t>
+            </a:r>
+            <a:endParaRPr/>
+          </a:p>
+          <a:p>
+            <a:pPr indent="0" lvl="0" marL="0" rtl="0" algn="l">
+              <a:spcBef>
+                <a:spcPts val="1200"/>
+              </a:spcBef>
+              <a:spcAft>
+                <a:spcPts val="1200"/>
+              </a:spcAft>
+              <a:buNone/>
+            </a:pPr>
+            <a:r>
+              <a:t/>
+            </a:r>
+            <a:endParaRPr strike="sngStrike"/>
+          </a:p>
+        </p:txBody>
+      </p:sp>
+      <p:sp>
+        <p:nvSpPr>
+          <p:cNvPr id="451" name="Google Shape;451;p67"/>
+          <p:cNvSpPr txBox="1"/>
+          <p:nvPr>
+            <p:ph idx="12" type="sldNum"/>
+          </p:nvPr>
+        </p:nvSpPr>
+        <p:spPr>
+          <a:xfrm>
+            <a:off x="7315202" y="4416550"/>
+            <a:ext cx="1828800" cy="731400"/>
+          </a:xfrm>
+          <a:prstGeom prst="rect">
+            <a:avLst/>
+          </a:prstGeom>
+        </p:spPr>
+        <p:txBody>
+          <a:bodyPr anchorCtr="0" anchor="b" bIns="91425" lIns="91425" spcFirstLastPara="1" rIns="91425" wrap="square" tIns="91425">
+            <a:noAutofit/>
+          </a:bodyPr>
+          <a:lstStyle/>
+          <a:p>
+            <a:pPr indent="0" lvl="0" marL="0" rtl="0" algn="r">
+              <a:spcBef>
+                <a:spcPts val="0"/>
+              </a:spcBef>
+              <a:spcAft>
+                <a:spcPts val="0"/>
+              </a:spcAft>
+              <a:buNone/>
+            </a:pPr>
+            <a:fld id="{00000000-1234-1234-1234-123412341234}" type="slidenum">
+              <a:rPr lang="en">
+                <a:solidFill>
+                  <a:schemeClr val="dk1"/>
+                </a:solidFill>
+              </a:rPr>
+              <a:t>‹#›</a:t>
+            </a:fld>
+            <a:endParaRPr>
+              <a:solidFill>
+                <a:schemeClr val="dk1"/>
+              </a:solidFill>
+            </a:endParaRPr>
+          </a:p>
+          <a:p>
+            <a:pPr indent="0" lvl="0" marL="0" rtl="0" algn="r">
+              <a:spcBef>
+                <a:spcPts val="0"/>
+              </a:spcBef>
+              <a:spcAft>
+                <a:spcPts val="0"/>
+              </a:spcAft>
+              <a:buNone/>
+            </a:pPr>
+            <a:r>
+              <a:rPr b="0" lang="en" sz="900" u="sng">
+                <a:solidFill>
+                  <a:schemeClr val="hlink"/>
+                </a:solidFill>
+                <a:hlinkClick r:id="rId3"/>
+              </a:rPr>
+              <a:t>https://oss.cs.fau.de</a:t>
+            </a:r>
+            <a:r>
+              <a:rPr b="0" lang="en" sz="900"/>
+              <a:t> </a:t>
+            </a:r>
+            <a:endParaRPr b="0" sz="900"/>
           </a:p>
         </p:txBody>
       </p:sp>
@@ -29319,7 +29592,7 @@
   <p:cSld>
     <p:spTree>
       <p:nvGrpSpPr>
-        <p:cNvPr id="453" name="Shape 453"/>
+        <p:cNvPr id="455" name="Shape 455"/>
         <p:cNvGrpSpPr/>
         <p:nvPr/>
       </p:nvGrpSpPr>
@@ -29333,7 +29606,7 @@
       </p:grpSpPr>
       <p:sp>
         <p:nvSpPr>
-          <p:cNvPr id="454" name="Google Shape;454;p68"/>
+          <p:cNvPr id="456" name="Google Shape;456;p68"/>
           <p:cNvSpPr txBox="1"/>
           <p:nvPr>
             <p:ph type="title"/>
@@ -29341,20 +29614,20 @@
         </p:nvSpPr>
         <p:spPr>
           <a:xfrm>
-            <a:off x="0" y="0"/>
-            <a:ext cx="9144000" cy="685800"/>
+            <a:off x="0" y="-7"/>
+            <a:ext cx="9144000" cy="2386500"/>
           </a:xfrm>
           <a:prstGeom prst="rect">
             <a:avLst/>
           </a:prstGeom>
         </p:spPr>
         <p:txBody>
-          <a:bodyPr anchorCtr="0" anchor="ctr" bIns="91425" lIns="274300" spcFirstLastPara="1" rIns="91425" wrap="square" tIns="91425">
+          <a:bodyPr anchorCtr="0" anchor="b" bIns="274300" lIns="91425" spcFirstLastPara="1" rIns="91425" wrap="square" tIns="91425">
             <a:noAutofit/>
           </a:bodyPr>
           <a:lstStyle/>
           <a:p>
-            <a:pPr indent="0" lvl="0" marL="0" rtl="0" algn="l">
+            <a:pPr indent="0" lvl="0" marL="0" rtl="0" algn="ctr">
               <a:spcBef>
                 <a:spcPts val="0"/>
               </a:spcBef>
@@ -29365,262 +29638,13 @@
             </a:pPr>
             <a:r>
               <a:rPr lang="en"/>
-              <a:t>Stand-up Emails</a:t>
-            </a:r>
-            <a:endParaRPr/>
-          </a:p>
-        </p:txBody>
-      </p:sp>
-      <p:sp>
-        <p:nvSpPr>
-          <p:cNvPr id="455" name="Google Shape;455;p68"/>
-          <p:cNvSpPr txBox="1"/>
-          <p:nvPr>
-            <p:ph idx="1" type="body"/>
-          </p:nvPr>
-        </p:nvSpPr>
-        <p:spPr>
-          <a:xfrm>
-            <a:off x="274320" y="914400"/>
-            <a:ext cx="8595300" cy="4114800"/>
-          </a:xfrm>
-          <a:prstGeom prst="rect">
-            <a:avLst/>
-          </a:prstGeom>
-        </p:spPr>
-        <p:txBody>
-          <a:bodyPr anchorCtr="0" anchor="t" bIns="0" lIns="0" spcFirstLastPara="1" rIns="0" wrap="square" tIns="0">
-            <a:noAutofit/>
-          </a:bodyPr>
-          <a:lstStyle/>
-          <a:p>
-            <a:pPr indent="0" lvl="0" marL="0" rtl="0" algn="l">
-              <a:spcBef>
-                <a:spcPts val="0"/>
-              </a:spcBef>
-              <a:spcAft>
-                <a:spcPts val="0"/>
-              </a:spcAft>
-              <a:buNone/>
-            </a:pPr>
+              <a:t>8</a:t>
+            </a:r>
             <a:r>
               <a:rPr lang="en"/>
-              <a:t>Stand-up emails are a communication mechanism that serves to</a:t>
-            </a:r>
-            <a:endParaRPr/>
-          </a:p>
-          <a:p>
-            <a:pPr indent="-342900" lvl="0" marL="457200" rtl="0" algn="l">
-              <a:spcBef>
-                <a:spcPts val="1200"/>
-              </a:spcBef>
-              <a:spcAft>
-                <a:spcPts val="0"/>
-              </a:spcAft>
-              <a:buSzPts val="1800"/>
-              <a:buChar char="●"/>
-            </a:pPr>
-            <a:r>
-              <a:rPr lang="en"/>
-              <a:t>Ensure regular updates about each other’s work state / progress</a:t>
-            </a:r>
-            <a:endParaRPr/>
-          </a:p>
-          <a:p>
-            <a:pPr indent="0" lvl="0" marL="0" rtl="0" algn="l">
-              <a:spcBef>
-                <a:spcPts val="1200"/>
-              </a:spcBef>
-              <a:spcAft>
-                <a:spcPts val="0"/>
-              </a:spcAft>
-              <a:buNone/>
-            </a:pPr>
-            <a:r>
-              <a:rPr lang="en"/>
-              <a:t>When writing a stand-up email, please consider these three topics</a:t>
-            </a:r>
-            <a:endParaRPr/>
-          </a:p>
-          <a:p>
-            <a:pPr indent="-342900" lvl="0" marL="457200" rtl="0" algn="l">
-              <a:spcBef>
-                <a:spcPts val="1200"/>
-              </a:spcBef>
-              <a:spcAft>
-                <a:spcPts val="0"/>
-              </a:spcAft>
-              <a:buSzPts val="1800"/>
-              <a:buAutoNum type="arabicPeriod"/>
-            </a:pPr>
-            <a:r>
-              <a:rPr lang="en"/>
-              <a:t>What did </a:t>
-            </a:r>
-            <a:r>
-              <a:rPr lang="en"/>
-              <a:t>you</a:t>
-            </a:r>
-            <a:r>
-              <a:rPr lang="en"/>
-              <a:t> get done since you last sent a stand-up email?</a:t>
-            </a:r>
-            <a:endParaRPr/>
-          </a:p>
-          <a:p>
-            <a:pPr indent="-342900" lvl="0" marL="457200" rtl="0" algn="l">
-              <a:spcBef>
-                <a:spcPts val="0"/>
-              </a:spcBef>
-              <a:spcAft>
-                <a:spcPts val="0"/>
-              </a:spcAft>
-              <a:buSzPts val="1800"/>
-              <a:buAutoNum type="arabicPeriod"/>
-            </a:pPr>
-            <a:r>
-              <a:rPr lang="en"/>
-              <a:t>What are your next steps / plans of work to do?</a:t>
-            </a:r>
-            <a:endParaRPr/>
-          </a:p>
-          <a:p>
-            <a:pPr indent="-342900" lvl="0" marL="457200" rtl="0" algn="l">
-              <a:spcBef>
-                <a:spcPts val="0"/>
-              </a:spcBef>
-              <a:spcAft>
-                <a:spcPts val="0"/>
-              </a:spcAft>
-              <a:buSzPts val="1800"/>
-              <a:buAutoNum type="arabicPeriod"/>
-            </a:pPr>
-            <a:r>
-              <a:rPr lang="en"/>
-              <a:t>What challenges are you facing?</a:t>
-            </a:r>
-            <a:endParaRPr/>
-          </a:p>
-          <a:p>
-            <a:pPr indent="0" lvl="0" marL="0" rtl="0" algn="l">
-              <a:spcBef>
-                <a:spcPts val="1200"/>
-              </a:spcBef>
-              <a:spcAft>
-                <a:spcPts val="0"/>
-              </a:spcAft>
-              <a:buNone/>
-            </a:pPr>
-            <a:r>
-              <a:rPr lang="en"/>
-              <a:t>Separate from the stand-up emails, feel free to</a:t>
-            </a:r>
-            <a:endParaRPr/>
-          </a:p>
-          <a:p>
-            <a:pPr indent="-342900" lvl="0" marL="457200" rtl="0" algn="l">
-              <a:spcBef>
-                <a:spcPts val="1200"/>
-              </a:spcBef>
-              <a:spcAft>
-                <a:spcPts val="0"/>
-              </a:spcAft>
-              <a:buSzPts val="1800"/>
-              <a:buChar char="●"/>
-            </a:pPr>
-            <a:r>
-              <a:rPr lang="en"/>
-              <a:t>Have your own communication channels</a:t>
-            </a:r>
-            <a:endParaRPr/>
-          </a:p>
-          <a:p>
-            <a:pPr indent="0" lvl="0" marL="0" rtl="0" algn="l">
-              <a:spcBef>
-                <a:spcPts val="1200"/>
-              </a:spcBef>
-              <a:spcAft>
-                <a:spcPts val="1200"/>
-              </a:spcAft>
-              <a:buNone/>
-            </a:pPr>
-            <a:r>
-              <a:t/>
-            </a:r>
-            <a:endParaRPr/>
-          </a:p>
-        </p:txBody>
-      </p:sp>
-      <p:sp>
-        <p:nvSpPr>
-          <p:cNvPr id="456" name="Google Shape;456;p68"/>
-          <p:cNvSpPr txBox="1"/>
-          <p:nvPr>
-            <p:ph idx="12" type="sldNum"/>
-          </p:nvPr>
-        </p:nvSpPr>
-        <p:spPr>
-          <a:xfrm>
-            <a:off x="7315202" y="4416550"/>
-            <a:ext cx="1828800" cy="731400"/>
-          </a:xfrm>
-          <a:prstGeom prst="rect">
-            <a:avLst/>
-          </a:prstGeom>
-        </p:spPr>
-        <p:txBody>
-          <a:bodyPr anchorCtr="0" anchor="b" bIns="91425" lIns="91425" spcFirstLastPara="1" rIns="91425" wrap="square" tIns="91425">
-            <a:noAutofit/>
-          </a:bodyPr>
-          <a:lstStyle/>
-          <a:p>
-            <a:pPr indent="0" lvl="0" marL="0" rtl="0" algn="r">
-              <a:spcBef>
-                <a:spcPts val="0"/>
-              </a:spcBef>
-              <a:spcAft>
-                <a:spcPts val="0"/>
-              </a:spcAft>
-              <a:buNone/>
-            </a:pPr>
-            <a:fld id="{00000000-1234-1234-1234-123412341234}" type="slidenum">
-              <a:rPr lang="en">
-                <a:solidFill>
-                  <a:schemeClr val="dk1"/>
-                </a:solidFill>
-              </a:rPr>
-              <a:t>‹#›</a:t>
-            </a:fld>
-            <a:endParaRPr>
-              <a:solidFill>
-                <a:schemeClr val="dk1"/>
-              </a:solidFill>
-            </a:endParaRPr>
-          </a:p>
-          <a:p>
-            <a:pPr indent="0" lvl="0" marL="0" rtl="0" algn="r">
-              <a:spcBef>
-                <a:spcPts val="0"/>
-              </a:spcBef>
-              <a:spcAft>
-                <a:spcPts val="0"/>
-              </a:spcAft>
-              <a:buNone/>
-            </a:pPr>
-            <a:r>
-              <a:rPr b="0" lang="en" sz="900" u="sng">
-                <a:solidFill>
-                  <a:schemeClr val="hlink"/>
-                </a:solidFill>
-                <a:hlinkClick r:id="rId3"/>
-              </a:rPr>
-              <a:t>https://oss.cs.fau.de</a:t>
-            </a:r>
-            <a:r>
-              <a:rPr b="0" lang="en" sz="900"/>
-              <a:t> </a:t>
-            </a:r>
-            <a:endParaRPr b="0" sz="900"/>
+              <a:t>. Stand-up Emails</a:t>
+            </a:r>
+            <a:endParaRPr/>
           </a:p>
         </p:txBody>
       </p:sp>
@@ -29683,10 +29707,6 @@
             </a:pPr>
             <a:r>
               <a:rPr lang="en"/>
-              <a:t>Regular Deliverable: </a:t>
-            </a:r>
-            <a:r>
-              <a:rPr lang="en"/>
               <a:t>Stand-up Emails</a:t>
             </a:r>
             <a:endParaRPr/>
@@ -29727,20 +29747,7 @@
             </a:pPr>
             <a:r>
               <a:rPr lang="en"/>
-              <a:t>Please s</a:t>
-            </a:r>
-            <a:r>
-              <a:rPr lang="en"/>
-              <a:t>end stand-up emails using the tool </a:t>
-            </a:r>
-            <a:r>
-              <a:rPr lang="en" u="sng">
-                <a:solidFill>
-                  <a:schemeClr val="hlink"/>
-                </a:solidFill>
-                <a:hlinkClick r:id="rId3"/>
-              </a:rPr>
-              <a:t>https://happy-amos.appspot.com/</a:t>
+              <a:t>Stand-up emails are a communication mechanism that serves to</a:t>
             </a:r>
             <a:endParaRPr/>
           </a:p>
@@ -29757,7 +29764,130 @@
             </a:pPr>
             <a:r>
               <a:rPr lang="en"/>
-              <a:t>At least twice in total, on different days of the week</a:t>
+              <a:t>Ensure regular updates about each other’s work state / progress</a:t>
+            </a:r>
+            <a:endParaRPr/>
+          </a:p>
+          <a:p>
+            <a:pPr indent="0" lvl="0" marL="0" rtl="0" algn="l">
+              <a:spcBef>
+                <a:spcPts val="1200"/>
+              </a:spcBef>
+              <a:spcAft>
+                <a:spcPts val="0"/>
+              </a:spcAft>
+              <a:buNone/>
+            </a:pPr>
+            <a:r>
+              <a:rPr lang="en"/>
+              <a:t>When writing a stand-up email, please consider these three topics</a:t>
+            </a:r>
+            <a:endParaRPr/>
+          </a:p>
+          <a:p>
+            <a:pPr indent="-342900" lvl="0" marL="457200" rtl="0" algn="l">
+              <a:spcBef>
+                <a:spcPts val="1200"/>
+              </a:spcBef>
+              <a:spcAft>
+                <a:spcPts val="0"/>
+              </a:spcAft>
+              <a:buSzPts val="1800"/>
+              <a:buAutoNum type="arabicPeriod"/>
+            </a:pPr>
+            <a:r>
+              <a:rPr lang="en"/>
+              <a:t>What did </a:t>
+            </a:r>
+            <a:r>
+              <a:rPr lang="en"/>
+              <a:t>you</a:t>
+            </a:r>
+            <a:r>
+              <a:rPr lang="en"/>
+              <a:t> get done since you last sent a stand-up email?</a:t>
+            </a:r>
+            <a:endParaRPr/>
+          </a:p>
+          <a:p>
+            <a:pPr indent="-342900" lvl="0" marL="457200" rtl="0" algn="l">
+              <a:spcBef>
+                <a:spcPts val="0"/>
+              </a:spcBef>
+              <a:spcAft>
+                <a:spcPts val="0"/>
+              </a:spcAft>
+              <a:buSzPts val="1800"/>
+              <a:buAutoNum type="arabicPeriod"/>
+            </a:pPr>
+            <a:r>
+              <a:rPr lang="en"/>
+              <a:t>What are your next steps / plans of work to do?</a:t>
+            </a:r>
+            <a:endParaRPr/>
+          </a:p>
+          <a:p>
+            <a:pPr indent="-342900" lvl="0" marL="457200" rtl="0" algn="l">
+              <a:spcBef>
+                <a:spcPts val="0"/>
+              </a:spcBef>
+              <a:spcAft>
+                <a:spcPts val="0"/>
+              </a:spcAft>
+              <a:buSzPts val="1800"/>
+              <a:buAutoNum type="arabicPeriod"/>
+            </a:pPr>
+            <a:r>
+              <a:rPr lang="en"/>
+              <a:t>What challenges are you facing?</a:t>
+            </a:r>
+            <a:endParaRPr/>
+          </a:p>
+          <a:p>
+            <a:pPr indent="0" lvl="0" marL="0" rtl="0" algn="l">
+              <a:spcBef>
+                <a:spcPts val="1200"/>
+              </a:spcBef>
+              <a:spcAft>
+                <a:spcPts val="0"/>
+              </a:spcAft>
+              <a:buNone/>
+            </a:pPr>
+            <a:r>
+              <a:rPr lang="en"/>
+              <a:t>Separate from the stand-up emails, feel free to</a:t>
+            </a:r>
+            <a:endParaRPr/>
+          </a:p>
+          <a:p>
+            <a:pPr indent="-342900" lvl="0" marL="457200" rtl="0" algn="l">
+              <a:spcBef>
+                <a:spcPts val="1200"/>
+              </a:spcBef>
+              <a:spcAft>
+                <a:spcPts val="0"/>
+              </a:spcAft>
+              <a:buSzPts val="1800"/>
+              <a:buChar char="●"/>
+            </a:pPr>
+            <a:r>
+              <a:rPr lang="en"/>
+              <a:t>Have your own communication channels</a:t>
+            </a:r>
+            <a:endParaRPr/>
+          </a:p>
+          <a:p>
+            <a:pPr indent="0" lvl="0" marL="0" rtl="0" algn="l">
+              <a:spcBef>
+                <a:spcPts val="1200"/>
+              </a:spcBef>
+              <a:spcAft>
+                <a:spcPts val="1200"/>
+              </a:spcAft>
+              <a:buNone/>
+            </a:pPr>
+            <a:r>
+              <a:t/>
             </a:r>
             <a:endParaRPr/>
           </a:p>
@@ -29824,6 +29954,222 @@
                 <a:solidFill>
                   <a:schemeClr val="hlink"/>
                 </a:solidFill>
+                <a:hlinkClick r:id="rId3"/>
+              </a:rPr>
+              <a:t>https://oss.cs.fau.de</a:t>
+            </a:r>
+            <a:r>
+              <a:rPr b="0" lang="en" sz="900"/>
+              <a:t> </a:t>
+            </a:r>
+            <a:endParaRPr b="0" sz="900"/>
+          </a:p>
+        </p:txBody>
+      </p:sp>
+    </p:spTree>
+  </p:cSld>
+  <p:clrMapOvr>
+    <a:masterClrMapping/>
+  </p:clrMapOvr>
+</p:sld>
+</file>
+
+<file path=ppt/slides/slide56.xml><?xml version="1.0" encoding="utf-8"?>
+<p:sld xmlns:a="http://schemas.openxmlformats.org/drawingml/2006/main" xmlns:r="http://schemas.openxmlformats.org/officeDocument/2006/relationships" xmlns:mc="http://schemas.openxmlformats.org/markup-compatibility/2006" xmlns:mv="urn:schemas-microsoft-com:mac:vml" xmlns:p="http://schemas.openxmlformats.org/presentationml/2006/main" xmlns:c="http://schemas.openxmlformats.org/drawingml/2006/chart" xmlns:dgm="http://schemas.openxmlformats.org/drawingml/2006/diagram" xmlns:o="urn:schemas-microsoft-com:office:office" xmlns:v="urn:schemas-microsoft-com:vml" xmlns:pvml="urn:schemas-microsoft-com:office:powerpoint" xmlns:com="http://schemas.openxmlformats.org/drawingml/2006/compatibility" xmlns:p14="http://schemas.microsoft.com/office/powerpoint/2010/main" xmlns:p15="http://schemas.microsoft.com/office/powerpoint/2012/main" xmlns:ahyp="http://schemas.microsoft.com/office/drawing/2018/hyperlinkcolor">
+  <p:cSld>
+    <p:spTree>
+      <p:nvGrpSpPr>
+        <p:cNvPr id="467" name="Shape 467"/>
+        <p:cNvGrpSpPr/>
+        <p:nvPr/>
+      </p:nvGrpSpPr>
+      <p:grpSpPr>
+        <a:xfrm>
+          <a:off x="0" y="0"/>
+          <a:ext cx="0" cy="0"/>
+          <a:chOff x="0" y="0"/>
+          <a:chExt cx="0" cy="0"/>
+        </a:xfrm>
+      </p:grpSpPr>
+      <p:sp>
+        <p:nvSpPr>
+          <p:cNvPr id="468" name="Google Shape;468;p70"/>
+          <p:cNvSpPr txBox="1"/>
+          <p:nvPr>
+            <p:ph type="title"/>
+          </p:nvPr>
+        </p:nvSpPr>
+        <p:spPr>
+          <a:xfrm>
+            <a:off x="0" y="0"/>
+            <a:ext cx="9144000" cy="685800"/>
+          </a:xfrm>
+          <a:prstGeom prst="rect">
+            <a:avLst/>
+          </a:prstGeom>
+        </p:spPr>
+        <p:txBody>
+          <a:bodyPr anchorCtr="0" anchor="ctr" bIns="91425" lIns="274300" spcFirstLastPara="1" rIns="91425" wrap="square" tIns="91425">
+            <a:noAutofit/>
+          </a:bodyPr>
+          <a:lstStyle/>
+          <a:p>
+            <a:pPr indent="0" lvl="0" marL="0" rtl="0" algn="l">
+              <a:spcBef>
+                <a:spcPts val="0"/>
+              </a:spcBef>
+              <a:spcAft>
+                <a:spcPts val="0"/>
+              </a:spcAft>
+              <a:buNone/>
+            </a:pPr>
+            <a:r>
+              <a:rPr lang="en"/>
+              <a:t>Regular Deliverable: </a:t>
+            </a:r>
+            <a:r>
+              <a:rPr lang="en"/>
+              <a:t>Stand-up Emails</a:t>
+            </a:r>
+            <a:endParaRPr/>
+          </a:p>
+        </p:txBody>
+      </p:sp>
+      <p:sp>
+        <p:nvSpPr>
+          <p:cNvPr id="469" name="Google Shape;469;p70"/>
+          <p:cNvSpPr txBox="1"/>
+          <p:nvPr>
+            <p:ph idx="1" type="body"/>
+          </p:nvPr>
+        </p:nvSpPr>
+        <p:spPr>
+          <a:xfrm>
+            <a:off x="274320" y="914400"/>
+            <a:ext cx="8595300" cy="4114800"/>
+          </a:xfrm>
+          <a:prstGeom prst="rect">
+            <a:avLst/>
+          </a:prstGeom>
+        </p:spPr>
+        <p:txBody>
+          <a:bodyPr anchorCtr="0" anchor="t" bIns="0" lIns="0" spcFirstLastPara="1" rIns="0" wrap="square" tIns="0">
+            <a:noAutofit/>
+          </a:bodyPr>
+          <a:lstStyle/>
+          <a:p>
+            <a:pPr indent="0" lvl="0" marL="0" rtl="0" algn="l">
+              <a:spcBef>
+                <a:spcPts val="0"/>
+              </a:spcBef>
+              <a:spcAft>
+                <a:spcPts val="0"/>
+              </a:spcAft>
+              <a:buNone/>
+            </a:pPr>
+            <a:r>
+              <a:rPr lang="en"/>
+              <a:t>Please s</a:t>
+            </a:r>
+            <a:r>
+              <a:rPr lang="en"/>
+              <a:t>end stand-up emails using the tool </a:t>
+            </a:r>
+            <a:r>
+              <a:rPr lang="en" u="sng">
+                <a:solidFill>
+                  <a:schemeClr val="hlink"/>
+                </a:solidFill>
+                <a:hlinkClick r:id="rId3"/>
+              </a:rPr>
+              <a:t>https://happy.uni1.de</a:t>
+            </a:r>
+            <a:r>
+              <a:rPr lang="en"/>
+              <a:t> </a:t>
+            </a:r>
+            <a:endParaRPr/>
+          </a:p>
+          <a:p>
+            <a:pPr indent="-342900" lvl="0" marL="457200" rtl="0" algn="l">
+              <a:spcBef>
+                <a:spcPts val="1200"/>
+              </a:spcBef>
+              <a:spcAft>
+                <a:spcPts val="0"/>
+              </a:spcAft>
+              <a:buSzPts val="1800"/>
+              <a:buChar char="●"/>
+            </a:pPr>
+            <a:r>
+              <a:rPr lang="en"/>
+              <a:t>At least twice in total, on different days of the week</a:t>
+            </a:r>
+            <a:endParaRPr/>
+          </a:p>
+        </p:txBody>
+      </p:sp>
+      <p:sp>
+        <p:nvSpPr>
+          <p:cNvPr id="470" name="Google Shape;470;p70"/>
+          <p:cNvSpPr txBox="1"/>
+          <p:nvPr>
+            <p:ph idx="12" type="sldNum"/>
+          </p:nvPr>
+        </p:nvSpPr>
+        <p:spPr>
+          <a:xfrm>
+            <a:off x="7315202" y="4416550"/>
+            <a:ext cx="1828800" cy="731400"/>
+          </a:xfrm>
+          <a:prstGeom prst="rect">
+            <a:avLst/>
+          </a:prstGeom>
+        </p:spPr>
+        <p:txBody>
+          <a:bodyPr anchorCtr="0" anchor="b" bIns="91425" lIns="91425" spcFirstLastPara="1" rIns="91425" wrap="square" tIns="91425">
+            <a:noAutofit/>
+          </a:bodyPr>
+          <a:lstStyle/>
+          <a:p>
+            <a:pPr indent="0" lvl="0" marL="0" rtl="0" algn="r">
+              <a:spcBef>
+                <a:spcPts val="0"/>
+              </a:spcBef>
+              <a:spcAft>
+                <a:spcPts val="0"/>
+              </a:spcAft>
+              <a:buNone/>
+            </a:pPr>
+            <a:fld id="{00000000-1234-1234-1234-123412341234}" type="slidenum">
+              <a:rPr lang="en">
+                <a:solidFill>
+                  <a:schemeClr val="dk1"/>
+                </a:solidFill>
+              </a:rPr>
+              <a:t>‹#›</a:t>
+            </a:fld>
+            <a:endParaRPr>
+              <a:solidFill>
+                <a:schemeClr val="dk1"/>
+              </a:solidFill>
+            </a:endParaRPr>
+          </a:p>
+          <a:p>
+            <a:pPr indent="0" lvl="0" marL="0" rtl="0" algn="r">
+              <a:spcBef>
+                <a:spcPts val="0"/>
+              </a:spcBef>
+              <a:spcAft>
+                <a:spcPts val="0"/>
+              </a:spcAft>
+              <a:buNone/>
+            </a:pPr>
+            <a:r>
+              <a:rPr b="0" lang="en" sz="900" u="sng">
+                <a:solidFill>
+                  <a:schemeClr val="hlink"/>
+                </a:solidFill>
                 <a:hlinkClick r:id="rId4"/>
               </a:rPr>
               <a:t>https://oss.cs.fau.de</a:t>
@@ -29838,7 +30184,7 @@
       </p:sp>
       <p:pic>
         <p:nvPicPr>
-          <p:cNvPr id="464" name="Google Shape;464;p69"/>
+          <p:cNvPr id="471" name="Google Shape;471;p70"/>
           <p:cNvPicPr preferRelativeResize="0"/>
           <p:nvPr/>
         </p:nvPicPr>
@@ -29878,12 +30224,12 @@
 </p:sld>
 </file>
 
-<file path=ppt/slides/slide56.xml><?xml version="1.0" encoding="utf-8"?>
+<file path=ppt/slides/slide57.xml><?xml version="1.0" encoding="utf-8"?>
 <p:sld xmlns:a="http://schemas.openxmlformats.org/drawingml/2006/main" xmlns:r="http://schemas.openxmlformats.org/officeDocument/2006/relationships" xmlns:mc="http://schemas.openxmlformats.org/markup-compatibility/2006" xmlns:mv="urn:schemas-microsoft-com:mac:vml" xmlns:p="http://schemas.openxmlformats.org/presentationml/2006/main" xmlns:c="http://schemas.openxmlformats.org/drawingml/2006/chart" xmlns:dgm="http://schemas.openxmlformats.org/drawingml/2006/diagram" xmlns:o="urn:schemas-microsoft-com:office:office" xmlns:v="urn:schemas-microsoft-com:vml" xmlns:pvml="urn:schemas-microsoft-com:office:powerpoint" xmlns:com="http://schemas.openxmlformats.org/drawingml/2006/compatibility" xmlns:p14="http://schemas.microsoft.com/office/powerpoint/2010/main" xmlns:p15="http://schemas.microsoft.com/office/powerpoint/2012/main" xmlns:ahyp="http://schemas.microsoft.com/office/drawing/2018/hyperlinkcolor">
   <p:cSld>
     <p:spTree>
       <p:nvGrpSpPr>
-        <p:cNvPr id="468" name="Shape 468"/>
+        <p:cNvPr id="475" name="Shape 475"/>
         <p:cNvGrpSpPr/>
         <p:nvPr/>
       </p:nvGrpSpPr>
@@ -29897,7 +30243,7 @@
       </p:grpSpPr>
       <p:sp>
         <p:nvSpPr>
-          <p:cNvPr id="469" name="Google Shape;469;p70"/>
+          <p:cNvPr id="476" name="Google Shape;476;p71"/>
           <p:cNvSpPr txBox="1"/>
           <p:nvPr>
             <p:ph type="title"/>
@@ -29943,12 +30289,12 @@
 </p:sld>
 </file>
 
-<file path=ppt/slides/slide57.xml><?xml version="1.0" encoding="utf-8"?>
+<file path=ppt/slides/slide58.xml><?xml version="1.0" encoding="utf-8"?>
 <p:sld xmlns:a="http://schemas.openxmlformats.org/drawingml/2006/main" xmlns:r="http://schemas.openxmlformats.org/officeDocument/2006/relationships" xmlns:mc="http://schemas.openxmlformats.org/markup-compatibility/2006" xmlns:mv="urn:schemas-microsoft-com:mac:vml" xmlns:p="http://schemas.openxmlformats.org/presentationml/2006/main" xmlns:c="http://schemas.openxmlformats.org/drawingml/2006/chart" xmlns:dgm="http://schemas.openxmlformats.org/drawingml/2006/diagram" xmlns:o="urn:schemas-microsoft-com:office:office" xmlns:v="urn:schemas-microsoft-com:vml" xmlns:pvml="urn:schemas-microsoft-com:office:powerpoint" xmlns:com="http://schemas.openxmlformats.org/drawingml/2006/compatibility" xmlns:p14="http://schemas.microsoft.com/office/powerpoint/2010/main" xmlns:p15="http://schemas.microsoft.com/office/powerpoint/2012/main" xmlns:ahyp="http://schemas.microsoft.com/office/drawing/2018/hyperlinkcolor">
   <p:cSld>
     <p:spTree>
       <p:nvGrpSpPr>
-        <p:cNvPr id="473" name="Shape 473"/>
+        <p:cNvPr id="480" name="Shape 480"/>
         <p:cNvGrpSpPr/>
         <p:nvPr/>
       </p:nvGrpSpPr>
@@ -29962,7 +30308,7 @@
       </p:grpSpPr>
       <p:sp>
         <p:nvSpPr>
-          <p:cNvPr id="474" name="Google Shape;474;p71"/>
+          <p:cNvPr id="481" name="Google Shape;481;p72"/>
           <p:cNvSpPr txBox="1"/>
           <p:nvPr>
             <p:ph type="title"/>
@@ -30002,7 +30348,7 @@
       </p:sp>
       <p:sp>
         <p:nvSpPr>
-          <p:cNvPr id="475" name="Google Shape;475;p71"/>
+          <p:cNvPr id="482" name="Google Shape;482;p72"/>
           <p:cNvSpPr txBox="1"/>
           <p:nvPr>
             <p:ph idx="1" type="body"/>
@@ -30042,7 +30388,7 @@
       </p:sp>
       <p:sp>
         <p:nvSpPr>
-          <p:cNvPr id="476" name="Google Shape;476;p71"/>
+          <p:cNvPr id="483" name="Google Shape;483;p72"/>
           <p:cNvSpPr txBox="1"/>
           <p:nvPr>
             <p:ph idx="12" type="sldNum"/>
@@ -30115,7 +30461,7 @@
       </p:sp>
       <p:pic>
         <p:nvPicPr>
-          <p:cNvPr id="477" name="Google Shape;477;p71"/>
+          <p:cNvPr id="484" name="Google Shape;484;p72"/>
           <p:cNvPicPr preferRelativeResize="0"/>
           <p:nvPr/>
         </p:nvPicPr>
@@ -30149,7 +30495,7 @@
       </p:pic>
       <p:sp>
         <p:nvSpPr>
-          <p:cNvPr id="478" name="Google Shape;478;p71"/>
+          <p:cNvPr id="485" name="Google Shape;485;p72"/>
           <p:cNvSpPr txBox="1"/>
           <p:nvPr/>
         </p:nvSpPr>
@@ -30190,246 +30536,6 @@
               <a:t>Originally: Emotions Seismograph</a:t>
             </a:r>
             <a:endParaRPr/>
-          </a:p>
-        </p:txBody>
-      </p:sp>
-    </p:spTree>
-  </p:cSld>
-  <p:clrMapOvr>
-    <a:masterClrMapping/>
-  </p:clrMapOvr>
-</p:sld>
-</file>
-
-<file path=ppt/slides/slide58.xml><?xml version="1.0" encoding="utf-8"?>
-<p:sld xmlns:a="http://schemas.openxmlformats.org/drawingml/2006/main" xmlns:r="http://schemas.openxmlformats.org/officeDocument/2006/relationships" xmlns:mc="http://schemas.openxmlformats.org/markup-compatibility/2006" xmlns:mv="urn:schemas-microsoft-com:mac:vml" xmlns:p="http://schemas.openxmlformats.org/presentationml/2006/main" xmlns:c="http://schemas.openxmlformats.org/drawingml/2006/chart" xmlns:dgm="http://schemas.openxmlformats.org/drawingml/2006/diagram" xmlns:o="urn:schemas-microsoft-com:office:office" xmlns:v="urn:schemas-microsoft-com:vml" xmlns:pvml="urn:schemas-microsoft-com:office:powerpoint" xmlns:com="http://schemas.openxmlformats.org/drawingml/2006/compatibility" xmlns:p14="http://schemas.microsoft.com/office/powerpoint/2010/main" xmlns:p15="http://schemas.microsoft.com/office/powerpoint/2012/main" xmlns:ahyp="http://schemas.microsoft.com/office/drawing/2018/hyperlinkcolor">
-  <p:cSld>
-    <p:spTree>
-      <p:nvGrpSpPr>
-        <p:cNvPr id="482" name="Shape 482"/>
-        <p:cNvGrpSpPr/>
-        <p:nvPr/>
-      </p:nvGrpSpPr>
-      <p:grpSpPr>
-        <a:xfrm>
-          <a:off x="0" y="0"/>
-          <a:ext cx="0" cy="0"/>
-          <a:chOff x="0" y="0"/>
-          <a:chExt cx="0" cy="0"/>
-        </a:xfrm>
-      </p:grpSpPr>
-      <p:sp>
-        <p:nvSpPr>
-          <p:cNvPr id="483" name="Google Shape;483;p72"/>
-          <p:cNvSpPr txBox="1"/>
-          <p:nvPr>
-            <p:ph type="title"/>
-          </p:nvPr>
-        </p:nvSpPr>
-        <p:spPr>
-          <a:xfrm>
-            <a:off x="0" y="0"/>
-            <a:ext cx="9144000" cy="685800"/>
-          </a:xfrm>
-          <a:prstGeom prst="rect">
-            <a:avLst/>
-          </a:prstGeom>
-        </p:spPr>
-        <p:txBody>
-          <a:bodyPr anchorCtr="0" anchor="ctr" bIns="91425" lIns="274300" spcFirstLastPara="1" rIns="91425" wrap="square" tIns="91425">
-            <a:noAutofit/>
-          </a:bodyPr>
-          <a:lstStyle/>
-          <a:p>
-            <a:pPr indent="0" lvl="0" marL="0" rtl="0" algn="l">
-              <a:spcBef>
-                <a:spcPts val="0"/>
-              </a:spcBef>
-              <a:spcAft>
-                <a:spcPts val="0"/>
-              </a:spcAft>
-              <a:buNone/>
-            </a:pPr>
-            <a:r>
-              <a:rPr lang="en"/>
-              <a:t>Regular Deliverable: Happiness Index</a:t>
-            </a:r>
-            <a:endParaRPr/>
-          </a:p>
-        </p:txBody>
-      </p:sp>
-      <p:sp>
-        <p:nvSpPr>
-          <p:cNvPr id="484" name="Google Shape;484;p72"/>
-          <p:cNvSpPr txBox="1"/>
-          <p:nvPr>
-            <p:ph idx="1" type="body"/>
-          </p:nvPr>
-        </p:nvSpPr>
-        <p:spPr>
-          <a:xfrm>
-            <a:off x="274320" y="914400"/>
-            <a:ext cx="8595300" cy="4114800"/>
-          </a:xfrm>
-          <a:prstGeom prst="rect">
-            <a:avLst/>
-          </a:prstGeom>
-        </p:spPr>
-        <p:txBody>
-          <a:bodyPr anchorCtr="0" anchor="t" bIns="0" lIns="0" spcFirstLastPara="1" rIns="0" wrap="square" tIns="0">
-            <a:noAutofit/>
-          </a:bodyPr>
-          <a:lstStyle/>
-          <a:p>
-            <a:pPr indent="0" lvl="0" marL="0" rtl="0" algn="l">
-              <a:spcBef>
-                <a:spcPts val="0"/>
-              </a:spcBef>
-              <a:spcAft>
-                <a:spcPts val="0"/>
-              </a:spcAft>
-              <a:buClr>
-                <a:schemeClr val="dk1"/>
-              </a:buClr>
-              <a:buSzPts val="1100"/>
-              <a:buFont typeface="Arial"/>
-              <a:buNone/>
-            </a:pPr>
-            <a:r>
-              <a:rPr lang="en"/>
-              <a:t>Please indicate your happiness using the tool </a:t>
-            </a:r>
-            <a:r>
-              <a:rPr lang="en" u="sng">
-                <a:solidFill>
-                  <a:schemeClr val="hlink"/>
-                </a:solidFill>
-                <a:hlinkClick r:id="rId3"/>
-              </a:rPr>
-              <a:t>https://happy-amos.appspot.com/</a:t>
-            </a:r>
-            <a:endParaRPr/>
-          </a:p>
-          <a:p>
-            <a:pPr indent="-342900" lvl="0" marL="457200" rtl="0" algn="l">
-              <a:spcBef>
-                <a:spcPts val="1200"/>
-              </a:spcBef>
-              <a:spcAft>
-                <a:spcPts val="0"/>
-              </a:spcAft>
-              <a:buSzPts val="1800"/>
-              <a:buChar char="●"/>
-            </a:pPr>
-            <a:r>
-              <a:rPr lang="en"/>
-              <a:t>Every team meeting, including the first and last one, until end of day</a:t>
-            </a:r>
-            <a:endParaRPr/>
-          </a:p>
-          <a:p>
-            <a:pPr indent="0" lvl="0" marL="0" rtl="0" algn="l">
-              <a:spcBef>
-                <a:spcPts val="1200"/>
-              </a:spcBef>
-              <a:spcAft>
-                <a:spcPts val="0"/>
-              </a:spcAft>
-              <a:buNone/>
-            </a:pPr>
-            <a:r>
-              <a:rPr lang="en"/>
-              <a:t>Your contributions (your happiness) remains anonymous</a:t>
-            </a:r>
-            <a:endParaRPr/>
-          </a:p>
-          <a:p>
-            <a:pPr indent="0" lvl="0" marL="0" rtl="0" algn="l">
-              <a:spcBef>
-                <a:spcPts val="1200"/>
-              </a:spcBef>
-              <a:spcAft>
-                <a:spcPts val="1200"/>
-              </a:spcAft>
-              <a:buNone/>
-            </a:pPr>
-            <a:r>
-              <a:t/>
-            </a:r>
-            <a:endParaRPr/>
-          </a:p>
-        </p:txBody>
-      </p:sp>
-      <p:sp>
-        <p:nvSpPr>
-          <p:cNvPr id="485" name="Google Shape;485;p72"/>
-          <p:cNvSpPr txBox="1"/>
-          <p:nvPr>
-            <p:ph idx="12" type="sldNum"/>
-          </p:nvPr>
-        </p:nvSpPr>
-        <p:spPr>
-          <a:xfrm>
-            <a:off x="7315202" y="4416550"/>
-            <a:ext cx="1828800" cy="731400"/>
-          </a:xfrm>
-          <a:prstGeom prst="rect">
-            <a:avLst/>
-          </a:prstGeom>
-        </p:spPr>
-        <p:txBody>
-          <a:bodyPr anchorCtr="0" anchor="b" bIns="91425" lIns="91425" spcFirstLastPara="1" rIns="91425" wrap="square" tIns="91425">
-            <a:noAutofit/>
-          </a:bodyPr>
-          <a:lstStyle/>
-          <a:p>
-            <a:pPr indent="0" lvl="0" marL="0" rtl="0" algn="r">
-              <a:spcBef>
-                <a:spcPts val="0"/>
-              </a:spcBef>
-              <a:spcAft>
-                <a:spcPts val="0"/>
-              </a:spcAft>
-              <a:buNone/>
-            </a:pPr>
-            <a:fld id="{00000000-1234-1234-1234-123412341234}" type="slidenum">
-              <a:rPr lang="en">
-                <a:solidFill>
-                  <a:schemeClr val="dk1"/>
-                </a:solidFill>
-              </a:rPr>
-              <a:t>‹#›</a:t>
-            </a:fld>
-            <a:endParaRPr>
-              <a:solidFill>
-                <a:schemeClr val="dk1"/>
-              </a:solidFill>
-            </a:endParaRPr>
-          </a:p>
-          <a:p>
-            <a:pPr indent="0" lvl="0" marL="0" rtl="0" algn="r">
-              <a:spcBef>
-                <a:spcPts val="0"/>
-              </a:spcBef>
-              <a:spcAft>
-                <a:spcPts val="0"/>
-              </a:spcAft>
-              <a:buNone/>
-            </a:pPr>
-            <a:r>
-              <a:rPr b="0" lang="en" sz="900" u="sng">
-                <a:solidFill>
-                  <a:schemeClr val="hlink"/>
-                </a:solidFill>
-                <a:hlinkClick r:id="rId4"/>
-              </a:rPr>
-              <a:t>https://oss.cs.fau.de</a:t>
-            </a:r>
-            <a:r>
-              <a:rPr b="0" lang="en" sz="900"/>
-              <a:t> </a:t>
-            </a:r>
-            <a:endParaRPr b="0" sz="900"/>
           </a:p>
         </p:txBody>
       </p:sp>
@@ -30463,234 +30569,6 @@
           <p:cNvPr id="490" name="Google Shape;490;p73"/>
           <p:cNvSpPr txBox="1"/>
           <p:nvPr>
-            <p:ph idx="1" type="body"/>
-          </p:nvPr>
-        </p:nvSpPr>
-        <p:spPr>
-          <a:xfrm>
-            <a:off x="274320" y="914400"/>
-            <a:ext cx="8595300" cy="4114800"/>
-          </a:xfrm>
-          <a:prstGeom prst="rect">
-            <a:avLst/>
-          </a:prstGeom>
-        </p:spPr>
-        <p:txBody>
-          <a:bodyPr anchorCtr="0" anchor="t" bIns="0" lIns="0" spcFirstLastPara="1" rIns="0" wrap="square" tIns="0">
-            <a:normAutofit/>
-          </a:bodyPr>
-          <a:lstStyle/>
-          <a:p>
-            <a:pPr indent="-342900" lvl="0" marL="457200" rtl="0" algn="l">
-              <a:spcBef>
-                <a:spcPts val="0"/>
-              </a:spcBef>
-              <a:spcAft>
-                <a:spcPts val="0"/>
-              </a:spcAft>
-              <a:buSzPts val="1800"/>
-              <a:buAutoNum type="arabicPeriod"/>
-            </a:pPr>
-            <a:r>
-              <a:rPr lang="en"/>
-              <a:t>Team formation</a:t>
-            </a:r>
-            <a:endParaRPr/>
-          </a:p>
-          <a:p>
-            <a:pPr indent="-317500" lvl="1" marL="914400" rtl="0" algn="l">
-              <a:spcBef>
-                <a:spcPts val="0"/>
-              </a:spcBef>
-              <a:spcAft>
-                <a:spcPts val="0"/>
-              </a:spcAft>
-              <a:buSzPts val="1400"/>
-              <a:buAutoNum type="alphaLcPeriod"/>
-            </a:pPr>
-            <a:r>
-              <a:rPr lang="en"/>
-              <a:t>Student roles</a:t>
-            </a:r>
-            <a:endParaRPr/>
-          </a:p>
-          <a:p>
-            <a:pPr indent="-317500" lvl="1" marL="914400" rtl="0" algn="l">
-              <a:spcBef>
-                <a:spcPts val="0"/>
-              </a:spcBef>
-              <a:spcAft>
-                <a:spcPts val="0"/>
-              </a:spcAft>
-              <a:buSzPts val="1400"/>
-              <a:buAutoNum type="alphaLcPeriod"/>
-            </a:pPr>
-            <a:r>
-              <a:rPr lang="en"/>
-              <a:t>Team contract</a:t>
-            </a:r>
-            <a:endParaRPr/>
-          </a:p>
-          <a:p>
-            <a:pPr indent="-317500" lvl="1" marL="914400" rtl="0" algn="l">
-              <a:spcBef>
-                <a:spcPts val="0"/>
-              </a:spcBef>
-              <a:spcAft>
-                <a:spcPts val="0"/>
-              </a:spcAft>
-              <a:buSzPts val="1400"/>
-              <a:buAutoNum type="alphaLcPeriod"/>
-            </a:pPr>
-            <a:r>
-              <a:rPr lang="en"/>
-              <a:t>Team logo and T-shirt</a:t>
-            </a:r>
-            <a:endParaRPr/>
-          </a:p>
-          <a:p>
-            <a:pPr indent="-342900" lvl="0" marL="457200" rtl="0" algn="l">
-              <a:spcBef>
-                <a:spcPts val="1000"/>
-              </a:spcBef>
-              <a:spcAft>
-                <a:spcPts val="0"/>
-              </a:spcAft>
-              <a:buSzPts val="1800"/>
-              <a:buAutoNum type="arabicPeriod"/>
-            </a:pPr>
-            <a:r>
-              <a:rPr lang="en"/>
-              <a:t>Project tools</a:t>
-            </a:r>
-            <a:endParaRPr/>
-          </a:p>
-          <a:p>
-            <a:pPr indent="-317500" lvl="1" marL="914400" rtl="0" algn="l">
-              <a:spcBef>
-                <a:spcPts val="0"/>
-              </a:spcBef>
-              <a:spcAft>
-                <a:spcPts val="0"/>
-              </a:spcAft>
-              <a:buSzPts val="1400"/>
-              <a:buAutoNum type="alphaLcPeriod"/>
-            </a:pPr>
-            <a:r>
-              <a:rPr lang="en"/>
-              <a:t>Planning document</a:t>
-            </a:r>
-            <a:endParaRPr/>
-          </a:p>
-          <a:p>
-            <a:pPr indent="-317500" lvl="1" marL="914400" rtl="0" algn="l">
-              <a:spcBef>
-                <a:spcPts val="0"/>
-              </a:spcBef>
-              <a:spcAft>
-                <a:spcPts val="0"/>
-              </a:spcAft>
-              <a:buSzPts val="1400"/>
-              <a:buAutoNum type="alphaLcPeriod"/>
-            </a:pPr>
-            <a:r>
-              <a:rPr lang="en"/>
-              <a:t>Feature board</a:t>
-            </a:r>
-            <a:endParaRPr/>
-          </a:p>
-          <a:p>
-            <a:pPr indent="-317500" lvl="1" marL="914400" rtl="0" algn="l">
-              <a:spcBef>
-                <a:spcPts val="0"/>
-              </a:spcBef>
-              <a:spcAft>
-                <a:spcPts val="0"/>
-              </a:spcAft>
-              <a:buSzPts val="1400"/>
-              <a:buAutoNum type="alphaLcPeriod"/>
-            </a:pPr>
-            <a:r>
-              <a:rPr lang="en"/>
-              <a:t>Code repository</a:t>
-            </a:r>
-            <a:endParaRPr/>
-          </a:p>
-          <a:p>
-            <a:pPr indent="-342900" lvl="0" marL="457200" rtl="0" algn="l">
-              <a:spcBef>
-                <a:spcPts val="1000"/>
-              </a:spcBef>
-              <a:spcAft>
-                <a:spcPts val="0"/>
-              </a:spcAft>
-              <a:buSzPts val="1800"/>
-              <a:buAutoNum type="arabicPeriod"/>
-            </a:pPr>
-            <a:r>
-              <a:rPr lang="en"/>
-              <a:t>Team coordination</a:t>
-            </a:r>
-            <a:endParaRPr/>
-          </a:p>
-          <a:p>
-            <a:pPr indent="-317500" lvl="1" marL="914400" rtl="0" algn="l">
-              <a:spcBef>
-                <a:spcPts val="0"/>
-              </a:spcBef>
-              <a:spcAft>
-                <a:spcPts val="0"/>
-              </a:spcAft>
-              <a:buSzPts val="1400"/>
-              <a:buAutoNum type="alphaLcPeriod"/>
-            </a:pPr>
-            <a:r>
-              <a:rPr lang="en"/>
-              <a:t>Imp-squared backlog</a:t>
-            </a:r>
-            <a:endParaRPr/>
-          </a:p>
-          <a:p>
-            <a:pPr indent="-317500" lvl="1" marL="914400" rtl="0" algn="l">
-              <a:spcBef>
-                <a:spcPts val="0"/>
-              </a:spcBef>
-              <a:spcAft>
-                <a:spcPts val="0"/>
-              </a:spcAft>
-              <a:buSzPts val="1400"/>
-              <a:buAutoNum type="alphaLcPeriod"/>
-            </a:pPr>
-            <a:r>
-              <a:rPr lang="en"/>
-              <a:t>Stand-up emails</a:t>
-            </a:r>
-            <a:endParaRPr/>
-          </a:p>
-          <a:p>
-            <a:pPr indent="-317500" lvl="1" marL="914400" rtl="0" algn="l">
-              <a:spcBef>
-                <a:spcPts val="0"/>
-              </a:spcBef>
-              <a:spcAft>
-                <a:spcPts val="0"/>
-              </a:spcAft>
-              <a:buSzPts val="1400"/>
-              <a:buAutoNum type="alphaLcPeriod"/>
-            </a:pPr>
-            <a:r>
-              <a:rPr lang="en"/>
-              <a:t>Happiness index</a:t>
-            </a:r>
-            <a:endParaRPr/>
-          </a:p>
-        </p:txBody>
-      </p:sp>
-      <p:sp>
-        <p:nvSpPr>
-          <p:cNvPr id="491" name="Google Shape;491;p73"/>
-          <p:cNvSpPr txBox="1"/>
-          <p:nvPr>
             <p:ph type="title"/>
           </p:nvPr>
         </p:nvSpPr>
@@ -30720,7 +30598,113 @@
             </a:pPr>
             <a:r>
               <a:rPr lang="en"/>
-              <a:t>Summary</a:t>
+              <a:t>Regular Deliverable: Happiness Index</a:t>
+            </a:r>
+            <a:endParaRPr/>
+          </a:p>
+        </p:txBody>
+      </p:sp>
+      <p:sp>
+        <p:nvSpPr>
+          <p:cNvPr id="491" name="Google Shape;491;p73"/>
+          <p:cNvSpPr txBox="1"/>
+          <p:nvPr>
+            <p:ph idx="1" type="body"/>
+          </p:nvPr>
+        </p:nvSpPr>
+        <p:spPr>
+          <a:xfrm>
+            <a:off x="274320" y="914400"/>
+            <a:ext cx="8595300" cy="4114800"/>
+          </a:xfrm>
+          <a:prstGeom prst="rect">
+            <a:avLst/>
+          </a:prstGeom>
+        </p:spPr>
+        <p:txBody>
+          <a:bodyPr anchorCtr="0" anchor="t" bIns="0" lIns="0" spcFirstLastPara="1" rIns="0" wrap="square" tIns="0">
+            <a:noAutofit/>
+          </a:bodyPr>
+          <a:lstStyle/>
+          <a:p>
+            <a:pPr indent="0" lvl="0" marL="0" rtl="0" algn="l">
+              <a:spcBef>
+                <a:spcPts val="0"/>
+              </a:spcBef>
+              <a:spcAft>
+                <a:spcPts val="0"/>
+              </a:spcAft>
+              <a:buClr>
+                <a:schemeClr val="dk1"/>
+              </a:buClr>
+              <a:buSzPts val="1100"/>
+              <a:buFont typeface="Arial"/>
+              <a:buNone/>
+            </a:pPr>
+            <a:r>
+              <a:rPr lang="en"/>
+              <a:t>Please indicate your happiness using the tool </a:t>
+            </a:r>
+            <a:r>
+              <a:rPr lang="en" u="sng">
+                <a:solidFill>
+                  <a:schemeClr val="hlink"/>
+                </a:solidFill>
+                <a:hlinkClick r:id="rId3"/>
+              </a:rPr>
+              <a:t>https://happy.uni1.de</a:t>
+            </a:r>
+            <a:r>
+              <a:rPr lang="en"/>
+              <a:t> </a:t>
+            </a:r>
+            <a:endParaRPr/>
+          </a:p>
+          <a:p>
+            <a:pPr indent="-342900" lvl="0" marL="457200" rtl="0" algn="l">
+              <a:spcBef>
+                <a:spcPts val="1200"/>
+              </a:spcBef>
+              <a:spcAft>
+                <a:spcPts val="0"/>
+              </a:spcAft>
+              <a:buSzPts val="1800"/>
+              <a:buChar char="●"/>
+            </a:pPr>
+            <a:r>
+              <a:rPr lang="en"/>
+              <a:t>Every team meeting, including the first and last one, until end of day</a:t>
+            </a:r>
+            <a:endParaRPr/>
+          </a:p>
+          <a:p>
+            <a:pPr indent="0" lvl="0" marL="0" rtl="0" algn="l">
+              <a:spcBef>
+                <a:spcPts val="1200"/>
+              </a:spcBef>
+              <a:spcAft>
+                <a:spcPts val="0"/>
+              </a:spcAft>
+              <a:buNone/>
+            </a:pPr>
+            <a:r>
+              <a:rPr lang="en"/>
+              <a:t>Your contributions (your happiness) remains anonymous</a:t>
+            </a:r>
+            <a:endParaRPr/>
+          </a:p>
+          <a:p>
+            <a:pPr indent="0" lvl="0" marL="0" rtl="0" algn="l">
+              <a:spcBef>
+                <a:spcPts val="1200"/>
+              </a:spcBef>
+              <a:spcAft>
+                <a:spcPts val="1200"/>
+              </a:spcAft>
+              <a:buNone/>
+            </a:pPr>
+            <a:r>
+              <a:t/>
             </a:r>
             <a:endParaRPr/>
           </a:p>
@@ -30787,7 +30771,7 @@
                 <a:solidFill>
                   <a:schemeClr val="hlink"/>
                 </a:solidFill>
-                <a:hlinkClick r:id="rId3"/>
+                <a:hlinkClick r:id="rId4"/>
               </a:rPr>
               <a:t>https://oss.cs.fau.de</a:t>
             </a:r>
@@ -31105,36 +31089,224 @@
           <p:cNvPr id="497" name="Google Shape;497;p74"/>
           <p:cNvSpPr txBox="1"/>
           <p:nvPr>
-            <p:ph type="ctrTitle"/>
+            <p:ph idx="1" type="body"/>
           </p:nvPr>
         </p:nvSpPr>
         <p:spPr>
           <a:xfrm>
-            <a:off x="0" y="0"/>
-            <a:ext cx="9144000" cy="2388900"/>
+            <a:off x="274320" y="914400"/>
+            <a:ext cx="8595300" cy="4114800"/>
           </a:xfrm>
           <a:prstGeom prst="rect">
             <a:avLst/>
           </a:prstGeom>
         </p:spPr>
         <p:txBody>
-          <a:bodyPr anchorCtr="0" anchor="b" bIns="274300" lIns="91425" spcFirstLastPara="1" rIns="91425" wrap="square" tIns="91425">
-            <a:noAutofit/>
+          <a:bodyPr anchorCtr="0" anchor="t" bIns="0" lIns="0" spcFirstLastPara="1" rIns="0" wrap="square" tIns="0">
+            <a:normAutofit/>
           </a:bodyPr>
           <a:lstStyle/>
           <a:p>
-            <a:pPr indent="0" lvl="0" marL="0" rtl="0" algn="ctr">
-              <a:spcBef>
-                <a:spcPts val="0"/>
-              </a:spcBef>
-              <a:spcAft>
-                <a:spcPts val="0"/>
-              </a:spcAft>
-              <a:buNone/>
+            <a:pPr indent="-342900" lvl="0" marL="457200" rtl="0" algn="l">
+              <a:spcBef>
+                <a:spcPts val="0"/>
+              </a:spcBef>
+              <a:spcAft>
+                <a:spcPts val="0"/>
+              </a:spcAft>
+              <a:buSzPts val="1800"/>
+              <a:buAutoNum type="arabicPeriod"/>
             </a:pPr>
             <a:r>
               <a:rPr lang="en"/>
-              <a:t>Thank you! Any questions?</a:t>
+              <a:t>Team formation</a:t>
+            </a:r>
+            <a:endParaRPr/>
+          </a:p>
+          <a:p>
+            <a:pPr indent="-317500" lvl="1" marL="914400" rtl="0" algn="l">
+              <a:spcBef>
+                <a:spcPts val="0"/>
+              </a:spcBef>
+              <a:spcAft>
+                <a:spcPts val="0"/>
+              </a:spcAft>
+              <a:buSzPts val="1400"/>
+              <a:buAutoNum type="alphaLcPeriod"/>
+            </a:pPr>
+            <a:r>
+              <a:rPr lang="en"/>
+              <a:t>Student roles</a:t>
+            </a:r>
+            <a:endParaRPr/>
+          </a:p>
+          <a:p>
+            <a:pPr indent="-317500" lvl="1" marL="914400" rtl="0" algn="l">
+              <a:spcBef>
+                <a:spcPts val="0"/>
+              </a:spcBef>
+              <a:spcAft>
+                <a:spcPts val="0"/>
+              </a:spcAft>
+              <a:buSzPts val="1400"/>
+              <a:buAutoNum type="alphaLcPeriod"/>
+            </a:pPr>
+            <a:r>
+              <a:rPr lang="en"/>
+              <a:t>Team contract</a:t>
+            </a:r>
+            <a:endParaRPr/>
+          </a:p>
+          <a:p>
+            <a:pPr indent="-317500" lvl="1" marL="914400" rtl="0" algn="l">
+              <a:spcBef>
+                <a:spcPts val="0"/>
+              </a:spcBef>
+              <a:spcAft>
+                <a:spcPts val="0"/>
+              </a:spcAft>
+              <a:buSzPts val="1400"/>
+              <a:buAutoNum type="alphaLcPeriod"/>
+            </a:pPr>
+            <a:r>
+              <a:rPr lang="en"/>
+              <a:t>Team logo and T-shirt</a:t>
+            </a:r>
+            <a:endParaRPr/>
+          </a:p>
+          <a:p>
+            <a:pPr indent="-342900" lvl="0" marL="457200" rtl="0" algn="l">
+              <a:spcBef>
+                <a:spcPts val="1000"/>
+              </a:spcBef>
+              <a:spcAft>
+                <a:spcPts val="0"/>
+              </a:spcAft>
+              <a:buSzPts val="1800"/>
+              <a:buAutoNum type="arabicPeriod"/>
+            </a:pPr>
+            <a:r>
+              <a:rPr lang="en"/>
+              <a:t>Project tools</a:t>
+            </a:r>
+            <a:endParaRPr/>
+          </a:p>
+          <a:p>
+            <a:pPr indent="-317500" lvl="1" marL="914400" rtl="0" algn="l">
+              <a:spcBef>
+                <a:spcPts val="0"/>
+              </a:spcBef>
+              <a:spcAft>
+                <a:spcPts val="0"/>
+              </a:spcAft>
+              <a:buSzPts val="1400"/>
+              <a:buAutoNum type="alphaLcPeriod"/>
+            </a:pPr>
+            <a:r>
+              <a:rPr lang="en"/>
+              <a:t>Planning document</a:t>
+            </a:r>
+            <a:endParaRPr/>
+          </a:p>
+          <a:p>
+            <a:pPr indent="-317500" lvl="1" marL="914400" rtl="0" algn="l">
+              <a:spcBef>
+                <a:spcPts val="0"/>
+              </a:spcBef>
+              <a:spcAft>
+                <a:spcPts val="0"/>
+              </a:spcAft>
+              <a:buSzPts val="1400"/>
+              <a:buAutoNum type="alphaLcPeriod"/>
+            </a:pPr>
+            <a:r>
+              <a:rPr lang="en"/>
+              <a:t>Feature board</a:t>
+            </a:r>
+            <a:endParaRPr/>
+          </a:p>
+          <a:p>
+            <a:pPr indent="-317500" lvl="1" marL="914400" rtl="0" algn="l">
+              <a:spcBef>
+                <a:spcPts val="0"/>
+              </a:spcBef>
+              <a:spcAft>
+                <a:spcPts val="0"/>
+              </a:spcAft>
+              <a:buSzPts val="1400"/>
+              <a:buAutoNum type="alphaLcPeriod"/>
+            </a:pPr>
+            <a:r>
+              <a:rPr lang="en"/>
+              <a:t>Code repository</a:t>
+            </a:r>
+            <a:endParaRPr/>
+          </a:p>
+          <a:p>
+            <a:pPr indent="-342900" lvl="0" marL="457200" rtl="0" algn="l">
+              <a:spcBef>
+                <a:spcPts val="1000"/>
+              </a:spcBef>
+              <a:spcAft>
+                <a:spcPts val="0"/>
+              </a:spcAft>
+              <a:buSzPts val="1800"/>
+              <a:buAutoNum type="arabicPeriod"/>
+            </a:pPr>
+            <a:r>
+              <a:rPr lang="en"/>
+              <a:t>Team coordination</a:t>
+            </a:r>
+            <a:endParaRPr/>
+          </a:p>
+          <a:p>
+            <a:pPr indent="-317500" lvl="1" marL="914400" rtl="0" algn="l">
+              <a:spcBef>
+                <a:spcPts val="0"/>
+              </a:spcBef>
+              <a:spcAft>
+                <a:spcPts val="0"/>
+              </a:spcAft>
+              <a:buSzPts val="1400"/>
+              <a:buAutoNum type="alphaLcPeriod"/>
+            </a:pPr>
+            <a:r>
+              <a:rPr lang="en"/>
+              <a:t>Imp-squared backlog</a:t>
+            </a:r>
+            <a:endParaRPr/>
+          </a:p>
+          <a:p>
+            <a:pPr indent="-317500" lvl="1" marL="914400" rtl="0" algn="l">
+              <a:spcBef>
+                <a:spcPts val="0"/>
+              </a:spcBef>
+              <a:spcAft>
+                <a:spcPts val="0"/>
+              </a:spcAft>
+              <a:buSzPts val="1400"/>
+              <a:buAutoNum type="alphaLcPeriod"/>
+            </a:pPr>
+            <a:r>
+              <a:rPr lang="en"/>
+              <a:t>Stand-up emails</a:t>
+            </a:r>
+            <a:endParaRPr/>
+          </a:p>
+          <a:p>
+            <a:pPr indent="-317500" lvl="1" marL="914400" rtl="0" algn="l">
+              <a:spcBef>
+                <a:spcPts val="0"/>
+              </a:spcBef>
+              <a:spcAft>
+                <a:spcPts val="0"/>
+              </a:spcAft>
+              <a:buSzPts val="1400"/>
+              <a:buAutoNum type="alphaLcPeriod"/>
+            </a:pPr>
+            <a:r>
+              <a:rPr lang="en"/>
+              <a:t>Happiness index</a:t>
             </a:r>
             <a:endParaRPr/>
           </a:p>
@@ -31145,117 +31317,111 @@
           <p:cNvPr id="498" name="Google Shape;498;p74"/>
           <p:cNvSpPr txBox="1"/>
           <p:nvPr>
-            <p:ph idx="1" type="subTitle"/>
+            <p:ph type="title"/>
           </p:nvPr>
         </p:nvSpPr>
         <p:spPr>
           <a:xfrm>
-            <a:off x="0" y="2569475"/>
-            <a:ext cx="9144000" cy="2574000"/>
+            <a:off x="0" y="0"/>
+            <a:ext cx="9144000" cy="685800"/>
           </a:xfrm>
           <a:prstGeom prst="rect">
             <a:avLst/>
           </a:prstGeom>
         </p:spPr>
         <p:txBody>
-          <a:bodyPr anchorCtr="0" anchor="t" bIns="91425" lIns="91425" spcFirstLastPara="1" rIns="91425" wrap="square" tIns="274300">
+          <a:bodyPr anchorCtr="0" anchor="ctr" bIns="91425" lIns="274300" spcFirstLastPara="1" rIns="91425" wrap="square" tIns="91425">
             <a:noAutofit/>
           </a:bodyPr>
           <a:lstStyle/>
           <a:p>
-            <a:pPr indent="0" lvl="0" marL="0" rtl="0" algn="ctr">
-              <a:lnSpc>
-                <a:spcPct val="150000"/>
-              </a:lnSpc>
-              <a:spcBef>
-                <a:spcPts val="0"/>
-              </a:spcBef>
-              <a:spcAft>
-                <a:spcPts val="0"/>
-              </a:spcAft>
-              <a:buNone/>
-            </a:pPr>
-            <a:r>
-              <a:rPr lang="en" u="sng">
+            <a:pPr indent="0" lvl="0" marL="0" rtl="0" algn="l">
+              <a:spcBef>
+                <a:spcPts val="0"/>
+              </a:spcBef>
+              <a:spcAft>
+                <a:spcPts val="0"/>
+              </a:spcAft>
+              <a:buNone/>
+            </a:pPr>
+            <a:r>
+              <a:rPr lang="en"/>
+              <a:t>Summary</a:t>
+            </a:r>
+            <a:endParaRPr/>
+          </a:p>
+        </p:txBody>
+      </p:sp>
+      <p:sp>
+        <p:nvSpPr>
+          <p:cNvPr id="499" name="Google Shape;499;p74"/>
+          <p:cNvSpPr txBox="1"/>
+          <p:nvPr>
+            <p:ph idx="12" type="sldNum"/>
+          </p:nvPr>
+        </p:nvSpPr>
+        <p:spPr>
+          <a:xfrm>
+            <a:off x="7315202" y="4416550"/>
+            <a:ext cx="1828800" cy="731400"/>
+          </a:xfrm>
+          <a:prstGeom prst="rect">
+            <a:avLst/>
+          </a:prstGeom>
+        </p:spPr>
+        <p:txBody>
+          <a:bodyPr anchorCtr="0" anchor="b" bIns="91425" lIns="91425" spcFirstLastPara="1" rIns="91425" wrap="square" tIns="91425">
+            <a:noAutofit/>
+          </a:bodyPr>
+          <a:lstStyle/>
+          <a:p>
+            <a:pPr indent="0" lvl="0" marL="0" rtl="0" algn="r">
+              <a:spcBef>
+                <a:spcPts val="0"/>
+              </a:spcBef>
+              <a:spcAft>
+                <a:spcPts val="0"/>
+              </a:spcAft>
+              <a:buNone/>
+            </a:pPr>
+            <a:fld id="{00000000-1234-1234-1234-123412341234}" type="slidenum">
+              <a:rPr lang="en">
+                <a:solidFill>
+                  <a:schemeClr val="dk1"/>
+                </a:solidFill>
+              </a:rPr>
+              <a:t>‹#›</a:t>
+            </a:fld>
+            <a:endParaRPr>
+              <a:solidFill>
+                <a:schemeClr val="dk1"/>
+              </a:solidFill>
+            </a:endParaRPr>
+          </a:p>
+          <a:p>
+            <a:pPr indent="0" lvl="0" marL="0" rtl="0" algn="r">
+              <a:spcBef>
+                <a:spcPts val="0"/>
+              </a:spcBef>
+              <a:spcAft>
+                <a:spcPts val="0"/>
+              </a:spcAft>
+              <a:buNone/>
+            </a:pPr>
+            <a:r>
+              <a:rPr b="0" lang="en" sz="900" u="sng">
                 <a:solidFill>
                   <a:schemeClr val="hlink"/>
                 </a:solidFill>
                 <a:hlinkClick r:id="rId3"/>
               </a:rPr>
-              <a:t>dirk.riehle@fau.de</a:t>
-            </a:r>
-            <a:r>
-              <a:rPr lang="en"/>
+              <a:t>https://oss.cs.fau.de</a:t>
+            </a:r>
+            <a:r>
+              <a:rPr b="0" lang="en" sz="900"/>
               <a:t> </a:t>
             </a:r>
-            <a:r>
-              <a:rPr lang="en" sz="2400"/>
-              <a:t>–</a:t>
-            </a:r>
-            <a:r>
-              <a:rPr lang="en"/>
-              <a:t> </a:t>
-            </a:r>
-            <a:r>
-              <a:rPr lang="en" u="sng">
-                <a:solidFill>
-                  <a:schemeClr val="hlink"/>
-                </a:solidFill>
-                <a:hlinkClick r:id="rId4"/>
-              </a:rPr>
-              <a:t>https://oss.cs.fau.de</a:t>
-            </a:r>
-            <a:endParaRPr/>
-          </a:p>
-          <a:p>
-            <a:pPr indent="0" lvl="0" marL="0" rtl="0" algn="ctr">
-              <a:lnSpc>
-                <a:spcPct val="150000"/>
-              </a:lnSpc>
-              <a:spcBef>
-                <a:spcPts val="0"/>
-              </a:spcBef>
-              <a:spcAft>
-                <a:spcPts val="0"/>
-              </a:spcAft>
-              <a:buNone/>
-            </a:pPr>
-            <a:r>
-              <a:rPr lang="en" sz="2400" u="sng">
-                <a:solidFill>
-                  <a:schemeClr val="hlink"/>
-                </a:solidFill>
-                <a:hlinkClick r:id="rId5"/>
-              </a:rPr>
-              <a:t>dirk@riehle.org</a:t>
-            </a:r>
-            <a:r>
-              <a:rPr lang="en" sz="2400"/>
-              <a:t> – </a:t>
-            </a:r>
-            <a:r>
-              <a:rPr lang="en" sz="2400" u="sng">
-                <a:solidFill>
-                  <a:schemeClr val="hlink"/>
-                </a:solidFill>
-                <a:hlinkClick r:id="rId6"/>
-              </a:rPr>
-              <a:t>https://dirkriehle.com</a:t>
-            </a:r>
-            <a:r>
-              <a:rPr lang="en" sz="2400"/>
-              <a:t> – </a:t>
-            </a:r>
-            <a:r>
-              <a:rPr lang="en" sz="2400" u="sng">
-                <a:solidFill>
-                  <a:schemeClr val="hlink"/>
-                </a:solidFill>
-                <a:hlinkClick r:id="rId7"/>
-              </a:rPr>
-              <a:t>@dirkriehle</a:t>
-            </a:r>
-            <a:endParaRPr sz="2400"/>
+            <a:endParaRPr b="0" sz="900"/>
           </a:p>
         </p:txBody>
       </p:sp>
@@ -31272,7 +31438,7 @@
   <p:cSld>
     <p:spTree>
       <p:nvGrpSpPr>
-        <p:cNvPr id="502" name="Shape 502"/>
+        <p:cNvPr id="503" name="Shape 503"/>
         <p:cNvGrpSpPr/>
         <p:nvPr/>
       </p:nvGrpSpPr>
@@ -31286,7 +31452,191 @@
       </p:grpSpPr>
       <p:sp>
         <p:nvSpPr>
-          <p:cNvPr id="503" name="Google Shape;503;p75"/>
+          <p:cNvPr id="504" name="Google Shape;504;p75"/>
+          <p:cNvSpPr txBox="1"/>
+          <p:nvPr>
+            <p:ph type="ctrTitle"/>
+          </p:nvPr>
+        </p:nvSpPr>
+        <p:spPr>
+          <a:xfrm>
+            <a:off x="0" y="0"/>
+            <a:ext cx="9144000" cy="2388900"/>
+          </a:xfrm>
+          <a:prstGeom prst="rect">
+            <a:avLst/>
+          </a:prstGeom>
+        </p:spPr>
+        <p:txBody>
+          <a:bodyPr anchorCtr="0" anchor="b" bIns="274300" lIns="91425" spcFirstLastPara="1" rIns="91425" wrap="square" tIns="91425">
+            <a:noAutofit/>
+          </a:bodyPr>
+          <a:lstStyle/>
+          <a:p>
+            <a:pPr indent="0" lvl="0" marL="0" rtl="0" algn="ctr">
+              <a:spcBef>
+                <a:spcPts val="0"/>
+              </a:spcBef>
+              <a:spcAft>
+                <a:spcPts val="0"/>
+              </a:spcAft>
+              <a:buNone/>
+            </a:pPr>
+            <a:r>
+              <a:rPr lang="en"/>
+              <a:t>Thank you! Any questions?</a:t>
+            </a:r>
+            <a:endParaRPr/>
+          </a:p>
+        </p:txBody>
+      </p:sp>
+      <p:sp>
+        <p:nvSpPr>
+          <p:cNvPr id="505" name="Google Shape;505;p75"/>
+          <p:cNvSpPr txBox="1"/>
+          <p:nvPr>
+            <p:ph idx="1" type="subTitle"/>
+          </p:nvPr>
+        </p:nvSpPr>
+        <p:spPr>
+          <a:xfrm>
+            <a:off x="0" y="2569475"/>
+            <a:ext cx="9144000" cy="2574000"/>
+          </a:xfrm>
+          <a:prstGeom prst="rect">
+            <a:avLst/>
+          </a:prstGeom>
+        </p:spPr>
+        <p:txBody>
+          <a:bodyPr anchorCtr="0" anchor="t" bIns="91425" lIns="91425" spcFirstLastPara="1" rIns="91425" wrap="square" tIns="274300">
+            <a:noAutofit/>
+          </a:bodyPr>
+          <a:lstStyle/>
+          <a:p>
+            <a:pPr indent="0" lvl="0" marL="0" rtl="0" algn="ctr">
+              <a:lnSpc>
+                <a:spcPct val="150000"/>
+              </a:lnSpc>
+              <a:spcBef>
+                <a:spcPts val="0"/>
+              </a:spcBef>
+              <a:spcAft>
+                <a:spcPts val="0"/>
+              </a:spcAft>
+              <a:buNone/>
+            </a:pPr>
+            <a:r>
+              <a:rPr lang="en" u="sng">
+                <a:solidFill>
+                  <a:schemeClr val="hlink"/>
+                </a:solidFill>
+                <a:hlinkClick r:id="rId3"/>
+              </a:rPr>
+              <a:t>dirk.riehle@fau.de</a:t>
+            </a:r>
+            <a:r>
+              <a:rPr lang="en"/>
+              <a:t> </a:t>
+            </a:r>
+            <a:r>
+              <a:rPr lang="en" sz="2400"/>
+              <a:t>–</a:t>
+            </a:r>
+            <a:r>
+              <a:rPr lang="en"/>
+              <a:t> </a:t>
+            </a:r>
+            <a:r>
+              <a:rPr lang="en" u="sng">
+                <a:solidFill>
+                  <a:schemeClr val="hlink"/>
+                </a:solidFill>
+                <a:hlinkClick r:id="rId4"/>
+              </a:rPr>
+              <a:t>https://oss.cs.fau.de</a:t>
+            </a:r>
+            <a:endParaRPr/>
+          </a:p>
+          <a:p>
+            <a:pPr indent="0" lvl="0" marL="0" rtl="0" algn="ctr">
+              <a:lnSpc>
+                <a:spcPct val="150000"/>
+              </a:lnSpc>
+              <a:spcBef>
+                <a:spcPts val="0"/>
+              </a:spcBef>
+              <a:spcAft>
+                <a:spcPts val="0"/>
+              </a:spcAft>
+              <a:buNone/>
+            </a:pPr>
+            <a:r>
+              <a:rPr lang="en" sz="2400" u="sng">
+                <a:solidFill>
+                  <a:schemeClr val="hlink"/>
+                </a:solidFill>
+                <a:hlinkClick r:id="rId5"/>
+              </a:rPr>
+              <a:t>dirk@riehle.org</a:t>
+            </a:r>
+            <a:r>
+              <a:rPr lang="en" sz="2400"/>
+              <a:t> – </a:t>
+            </a:r>
+            <a:r>
+              <a:rPr lang="en" sz="2400" u="sng">
+                <a:solidFill>
+                  <a:schemeClr val="hlink"/>
+                </a:solidFill>
+                <a:hlinkClick r:id="rId6"/>
+              </a:rPr>
+              <a:t>https://dirkriehle.com</a:t>
+            </a:r>
+            <a:r>
+              <a:rPr lang="en" sz="2400"/>
+              <a:t> – </a:t>
+            </a:r>
+            <a:r>
+              <a:rPr lang="en" sz="2400" u="sng">
+                <a:solidFill>
+                  <a:schemeClr val="hlink"/>
+                </a:solidFill>
+                <a:hlinkClick r:id="rId7"/>
+              </a:rPr>
+              <a:t>@dirkriehle</a:t>
+            </a:r>
+            <a:endParaRPr sz="2400"/>
+          </a:p>
+        </p:txBody>
+      </p:sp>
+    </p:spTree>
+  </p:cSld>
+  <p:clrMapOvr>
+    <a:masterClrMapping/>
+  </p:clrMapOvr>
+</p:sld>
+</file>
+
+<file path=ppt/slides/slide62.xml><?xml version="1.0" encoding="utf-8"?>
+<p:sld xmlns:a="http://schemas.openxmlformats.org/drawingml/2006/main" xmlns:r="http://schemas.openxmlformats.org/officeDocument/2006/relationships" xmlns:mc="http://schemas.openxmlformats.org/markup-compatibility/2006" xmlns:mv="urn:schemas-microsoft-com:mac:vml" xmlns:p="http://schemas.openxmlformats.org/presentationml/2006/main" xmlns:c="http://schemas.openxmlformats.org/drawingml/2006/chart" xmlns:dgm="http://schemas.openxmlformats.org/drawingml/2006/diagram" xmlns:o="urn:schemas-microsoft-com:office:office" xmlns:v="urn:schemas-microsoft-com:vml" xmlns:pvml="urn:schemas-microsoft-com:office:powerpoint" xmlns:com="http://schemas.openxmlformats.org/drawingml/2006/compatibility" xmlns:p14="http://schemas.microsoft.com/office/powerpoint/2010/main" xmlns:p15="http://schemas.microsoft.com/office/powerpoint/2012/main" xmlns:ahyp="http://schemas.microsoft.com/office/drawing/2018/hyperlinkcolor">
+  <p:cSld>
+    <p:spTree>
+      <p:nvGrpSpPr>
+        <p:cNvPr id="509" name="Shape 509"/>
+        <p:cNvGrpSpPr/>
+        <p:nvPr/>
+      </p:nvGrpSpPr>
+      <p:grpSpPr>
+        <a:xfrm>
+          <a:off x="0" y="0"/>
+          <a:ext cx="0" cy="0"/>
+          <a:chOff x="0" y="0"/>
+          <a:chExt cx="0" cy="0"/>
+        </a:xfrm>
+      </p:grpSpPr>
+      <p:sp>
+        <p:nvSpPr>
+          <p:cNvPr id="510" name="Google Shape;510;p76"/>
           <p:cNvSpPr txBox="1"/>
           <p:nvPr>
             <p:ph type="title"/>
@@ -31326,7 +31676,7 @@
       </p:sp>
       <p:sp>
         <p:nvSpPr>
-          <p:cNvPr id="504" name="Google Shape;504;p75"/>
+          <p:cNvPr id="511" name="Google Shape;511;p76"/>
           <p:cNvSpPr txBox="1"/>
           <p:nvPr>
             <p:ph idx="12" type="sldNum"/>
@@ -31399,7 +31749,7 @@
       </p:sp>
       <p:sp>
         <p:nvSpPr>
-          <p:cNvPr id="505" name="Google Shape;505;p75"/>
+          <p:cNvPr id="512" name="Google Shape;512;p76"/>
           <p:cNvSpPr txBox="1"/>
           <p:nvPr>
             <p:ph idx="1" type="body"/>
@@ -32174,7 +32524,7 @@
 </file>
 
 <file path=ppt/theme/theme1.xml><?xml version="1.0" encoding="utf-8"?>
-<a:theme xmlns:a="http://schemas.openxmlformats.org/drawingml/2006/main" xmlns:r="http://schemas.openxmlformats.org/officeDocument/2006/relationships" name="POSS Slides Template">
+<a:theme xmlns:a="http://schemas.openxmlformats.org/drawingml/2006/main" xmlns:r="http://schemas.openxmlformats.org/officeDocument/2006/relationships" name="AMOS Slides Template">
   <a:themeElements>
     <a:clrScheme name="Simple Light">
       <a:dk1>
@@ -32732,7 +33082,7 @@
 </file>
 
 <file path=ppt/theme/theme3.xml><?xml version="1.0" encoding="utf-8"?>
-<a:theme xmlns:a="http://schemas.openxmlformats.org/drawingml/2006/main" xmlns:r="http://schemas.openxmlformats.org/officeDocument/2006/relationships" name="AMOS Slides Template">
+<a:theme xmlns:a="http://schemas.openxmlformats.org/drawingml/2006/main" xmlns:r="http://schemas.openxmlformats.org/officeDocument/2006/relationships" name="POSS Slides Template">
   <a:themeElements>
     <a:clrScheme name="Simple Light">
       <a:dk1>
